--- a/submission/NC/figures_polished/Fig3.pptx
+++ b/submission/NC/figures_polished/Fig3.pptx
@@ -2679,8 +2679,8 @@
         </p:nvSpPr>
         <p:spPr>
           <a:xfrm>
-            <a:off x="5373360" y="1585080"/>
-            <a:ext cx="1078920" cy="323640"/>
+            <a:off x="5373000" y="1585080"/>
+            <a:ext cx="1079280" cy="323640"/>
           </a:xfrm>
           <a:custGeom>
             <a:avLst/>
@@ -2688,15 +2688,15 @@
             <a:ahLst/>
             <a:rect l="0" t="0" r="r" b="b"/>
             <a:pathLst>
-              <a:path w="2997" h="899">
+              <a:path w="2998" h="899">
                 <a:moveTo>
                   <a:pt x="0" y="0"/>
                 </a:moveTo>
                 <a:lnTo>
-                  <a:pt x="2997" y="0"/>
-                </a:lnTo>
-                <a:lnTo>
-                  <a:pt x="2997" y="899"/>
+                  <a:pt x="2998" y="0"/>
+                </a:lnTo>
+                <a:lnTo>
+                  <a:pt x="2998" y="899"/>
                 </a:lnTo>
                 <a:lnTo>
                   <a:pt x="0" y="899"/>
@@ -2931,8 +2931,8 @@
         </p:nvSpPr>
         <p:spPr>
           <a:xfrm>
-            <a:off x="5452920" y="1046520"/>
-            <a:ext cx="999360" cy="323640"/>
+            <a:off x="5452560" y="1046520"/>
+            <a:ext cx="999720" cy="323640"/>
           </a:xfrm>
           <a:custGeom>
             <a:avLst/>
@@ -2940,15 +2940,15 @@
             <a:ahLst/>
             <a:rect l="0" t="0" r="r" b="b"/>
             <a:pathLst>
-              <a:path w="2776" h="899">
+              <a:path w="2777" h="899">
                 <a:moveTo>
                   <a:pt x="0" y="0"/>
                 </a:moveTo>
                 <a:lnTo>
-                  <a:pt x="2776" y="0"/>
-                </a:lnTo>
-                <a:lnTo>
-                  <a:pt x="2776" y="899"/>
+                  <a:pt x="2777" y="0"/>
+                </a:lnTo>
+                <a:lnTo>
+                  <a:pt x="2777" y="899"/>
                 </a:lnTo>
                 <a:lnTo>
                   <a:pt x="0" y="899"/>
@@ -2995,7 +2995,7 @@
         <p:spPr>
           <a:xfrm>
             <a:off x="4089600" y="1046520"/>
-            <a:ext cx="1363680" cy="323640"/>
+            <a:ext cx="1363320" cy="323640"/>
           </a:xfrm>
           <a:custGeom>
             <a:avLst/>
@@ -3003,15 +3003,15 @@
             <a:ahLst/>
             <a:rect l="0" t="0" r="r" b="b"/>
             <a:pathLst>
-              <a:path w="3788" h="899">
+              <a:path w="3787" h="899">
                 <a:moveTo>
                   <a:pt x="0" y="0"/>
                 </a:moveTo>
                 <a:lnTo>
-                  <a:pt x="3788" y="0"/>
-                </a:lnTo>
-                <a:lnTo>
-                  <a:pt x="3788" y="899"/>
+                  <a:pt x="3787" y="0"/>
+                </a:lnTo>
+                <a:lnTo>
+                  <a:pt x="3787" y="899"/>
                 </a:lnTo>
                 <a:lnTo>
                   <a:pt x="0" y="899"/>
@@ -3105,7 +3105,7 @@
         </p:nvSpPr>
         <p:spPr>
           <a:xfrm>
-            <a:off x="5843160" y="1702440"/>
+            <a:off x="5842800" y="1702440"/>
             <a:ext cx="153360" cy="86040"/>
           </a:xfrm>
           <a:prstGeom prst="rect">
@@ -3153,7 +3153,7 @@
         </p:nvSpPr>
         <p:spPr>
           <a:xfrm>
-            <a:off x="4662000" y="1702440"/>
+            <a:off x="4661640" y="1702440"/>
             <a:ext cx="153360" cy="86040"/>
           </a:xfrm>
           <a:prstGeom prst="rect">
@@ -3201,7 +3201,7 @@
         </p:nvSpPr>
         <p:spPr>
           <a:xfrm>
-            <a:off x="5667840" y="625320"/>
+            <a:off x="5667480" y="625320"/>
             <a:ext cx="153360" cy="86040"/>
           </a:xfrm>
           <a:prstGeom prst="rect">
@@ -3228,7 +3228,7 @@
                 <a:latin typeface="Arial"/>
                 <a:ea typeface="Arial"/>
               </a:rPr>
-              <a:t>60%</a:t>
+              <a:t>61%</a:t>
             </a:r>
             <a:endParaRPr lang="en-US" sz="600" b="0" u="none" strike="noStrike">
               <a:solidFill>
@@ -3276,7 +3276,7 @@
                 <a:latin typeface="Arial"/>
                 <a:ea typeface="Arial"/>
               </a:rPr>
-              <a:t>40%</a:t>
+              <a:t>39%</a:t>
             </a:r>
             <a:endParaRPr lang="en-US" sz="600" b="0" u="none" strike="noStrike">
               <a:solidFill>
@@ -4573,8 +4573,8 @@
         </p:nvSpPr>
         <p:spPr>
           <a:xfrm>
-            <a:off x="491040" y="2727720"/>
-            <a:ext cx="2625120" cy="1597320"/>
+            <a:off x="491040" y="2711160"/>
+            <a:ext cx="2625120" cy="1618560"/>
           </a:xfrm>
           <a:custGeom>
             <a:avLst/>
@@ -4582,369 +4582,369 @@
             <a:ahLst/>
             <a:rect l="0" t="0" r="r" b="b"/>
             <a:pathLst>
-              <a:path w="7292" h="4437">
+              <a:path w="7292" h="4496">
                 <a:moveTo>
-                  <a:pt x="0" y="4033"/>
+                  <a:pt x="0" y="4114"/>
                 </a:moveTo>
                 <a:lnTo>
-                  <a:pt x="124" y="4018"/>
-                </a:lnTo>
-                <a:lnTo>
-                  <a:pt x="247" y="4002"/>
-                </a:lnTo>
-                <a:lnTo>
-                  <a:pt x="371" y="3986"/>
-                </a:lnTo>
-                <a:lnTo>
-                  <a:pt x="495" y="3970"/>
-                </a:lnTo>
-                <a:lnTo>
-                  <a:pt x="618" y="3953"/>
-                </a:lnTo>
-                <a:lnTo>
-                  <a:pt x="742" y="3936"/>
-                </a:lnTo>
-                <a:lnTo>
-                  <a:pt x="865" y="3918"/>
-                </a:lnTo>
-                <a:lnTo>
-                  <a:pt x="989" y="3900"/>
-                </a:lnTo>
-                <a:lnTo>
-                  <a:pt x="1112" y="3881"/>
-                </a:lnTo>
-                <a:lnTo>
-                  <a:pt x="1236" y="3861"/>
-                </a:lnTo>
-                <a:lnTo>
-                  <a:pt x="1360" y="3841"/>
-                </a:lnTo>
-                <a:lnTo>
-                  <a:pt x="1483" y="3820"/>
-                </a:lnTo>
-                <a:lnTo>
-                  <a:pt x="1607" y="3799"/>
-                </a:lnTo>
-                <a:lnTo>
-                  <a:pt x="1730" y="3776"/>
-                </a:lnTo>
-                <a:lnTo>
-                  <a:pt x="1854" y="3753"/>
-                </a:lnTo>
-                <a:lnTo>
-                  <a:pt x="1977" y="3730"/>
-                </a:lnTo>
-                <a:lnTo>
-                  <a:pt x="2101" y="3705"/>
-                </a:lnTo>
-                <a:lnTo>
-                  <a:pt x="2224" y="3679"/>
-                </a:lnTo>
-                <a:lnTo>
-                  <a:pt x="2349" y="3652"/>
-                </a:lnTo>
-                <a:lnTo>
-                  <a:pt x="2473" y="3625"/>
-                </a:lnTo>
-                <a:lnTo>
-                  <a:pt x="2596" y="3596"/>
-                </a:lnTo>
-                <a:lnTo>
-                  <a:pt x="2720" y="3565"/>
-                </a:lnTo>
-                <a:lnTo>
-                  <a:pt x="2843" y="3534"/>
-                </a:lnTo>
-                <a:lnTo>
-                  <a:pt x="2967" y="3500"/>
-                </a:lnTo>
-                <a:lnTo>
-                  <a:pt x="3090" y="3465"/>
-                </a:lnTo>
-                <a:lnTo>
-                  <a:pt x="3214" y="3429"/>
-                </a:lnTo>
-                <a:lnTo>
-                  <a:pt x="3338" y="3391"/>
-                </a:lnTo>
-                <a:lnTo>
-                  <a:pt x="3461" y="3351"/>
-                </a:lnTo>
-                <a:lnTo>
-                  <a:pt x="3585" y="3308"/>
-                </a:lnTo>
-                <a:lnTo>
-                  <a:pt x="3708" y="3264"/>
-                </a:lnTo>
-                <a:lnTo>
-                  <a:pt x="3832" y="3217"/>
-                </a:lnTo>
-                <a:lnTo>
-                  <a:pt x="3955" y="3167"/>
-                </a:lnTo>
-                <a:lnTo>
-                  <a:pt x="4079" y="3115"/>
-                </a:lnTo>
-                <a:lnTo>
-                  <a:pt x="4203" y="3059"/>
-                </a:lnTo>
-                <a:lnTo>
-                  <a:pt x="4326" y="3000"/>
-                </a:lnTo>
-                <a:lnTo>
-                  <a:pt x="4450" y="2938"/>
-                </a:lnTo>
-                <a:lnTo>
-                  <a:pt x="4573" y="2872"/>
-                </a:lnTo>
-                <a:lnTo>
-                  <a:pt x="4697" y="2802"/>
-                </a:lnTo>
-                <a:lnTo>
-                  <a:pt x="4820" y="2728"/>
-                </a:lnTo>
-                <a:lnTo>
-                  <a:pt x="4944" y="2650"/>
-                </a:lnTo>
-                <a:lnTo>
-                  <a:pt x="5068" y="2567"/>
-                </a:lnTo>
-                <a:lnTo>
-                  <a:pt x="5191" y="2479"/>
-                </a:lnTo>
-                <a:lnTo>
-                  <a:pt x="5315" y="2387"/>
-                </a:lnTo>
-                <a:lnTo>
-                  <a:pt x="5438" y="2289"/>
-                </a:lnTo>
-                <a:lnTo>
-                  <a:pt x="5562" y="2186"/>
-                </a:lnTo>
-                <a:lnTo>
-                  <a:pt x="5685" y="2077"/>
-                </a:lnTo>
-                <a:lnTo>
-                  <a:pt x="5809" y="1962"/>
-                </a:lnTo>
-                <a:lnTo>
-                  <a:pt x="5933" y="1841"/>
-                </a:lnTo>
-                <a:lnTo>
-                  <a:pt x="6056" y="1713"/>
-                </a:lnTo>
-                <a:lnTo>
-                  <a:pt x="6180" y="1579"/>
-                </a:lnTo>
-                <a:lnTo>
-                  <a:pt x="6303" y="1437"/>
-                </a:lnTo>
-                <a:lnTo>
-                  <a:pt x="6427" y="1288"/>
-                </a:lnTo>
-                <a:lnTo>
-                  <a:pt x="6550" y="1131"/>
-                </a:lnTo>
-                <a:lnTo>
-                  <a:pt x="6674" y="965"/>
-                </a:lnTo>
-                <a:lnTo>
-                  <a:pt x="6798" y="791"/>
-                </a:lnTo>
-                <a:lnTo>
-                  <a:pt x="6921" y="608"/>
-                </a:lnTo>
-                <a:lnTo>
-                  <a:pt x="7045" y="416"/>
-                </a:lnTo>
-                <a:lnTo>
-                  <a:pt x="7168" y="213"/>
+                  <a:pt x="124" y="4099"/>
+                </a:lnTo>
+                <a:lnTo>
+                  <a:pt x="247" y="4084"/>
+                </a:lnTo>
+                <a:lnTo>
+                  <a:pt x="371" y="4068"/>
+                </a:lnTo>
+                <a:lnTo>
+                  <a:pt x="495" y="4052"/>
+                </a:lnTo>
+                <a:lnTo>
+                  <a:pt x="618" y="4035"/>
+                </a:lnTo>
+                <a:lnTo>
+                  <a:pt x="742" y="4018"/>
+                </a:lnTo>
+                <a:lnTo>
+                  <a:pt x="865" y="4000"/>
+                </a:lnTo>
+                <a:lnTo>
+                  <a:pt x="989" y="3982"/>
+                </a:lnTo>
+                <a:lnTo>
+                  <a:pt x="1112" y="3963"/>
+                </a:lnTo>
+                <a:lnTo>
+                  <a:pt x="1236" y="3944"/>
+                </a:lnTo>
+                <a:lnTo>
+                  <a:pt x="1360" y="3923"/>
+                </a:lnTo>
+                <a:lnTo>
+                  <a:pt x="1483" y="3903"/>
+                </a:lnTo>
+                <a:lnTo>
+                  <a:pt x="1607" y="3881"/>
+                </a:lnTo>
+                <a:lnTo>
+                  <a:pt x="1730" y="3859"/>
+                </a:lnTo>
+                <a:lnTo>
+                  <a:pt x="1854" y="3835"/>
+                </a:lnTo>
+                <a:lnTo>
+                  <a:pt x="1977" y="3811"/>
+                </a:lnTo>
+                <a:lnTo>
+                  <a:pt x="2101" y="3787"/>
+                </a:lnTo>
+                <a:lnTo>
+                  <a:pt x="2224" y="3761"/>
+                </a:lnTo>
+                <a:lnTo>
+                  <a:pt x="2349" y="3734"/>
+                </a:lnTo>
+                <a:lnTo>
+                  <a:pt x="2473" y="3706"/>
+                </a:lnTo>
+                <a:lnTo>
+                  <a:pt x="2596" y="3676"/>
+                </a:lnTo>
+                <a:lnTo>
+                  <a:pt x="2720" y="3645"/>
+                </a:lnTo>
+                <a:lnTo>
+                  <a:pt x="2843" y="3613"/>
+                </a:lnTo>
+                <a:lnTo>
+                  <a:pt x="2967" y="3580"/>
+                </a:lnTo>
+                <a:lnTo>
+                  <a:pt x="3090" y="3545"/>
+                </a:lnTo>
+                <a:lnTo>
+                  <a:pt x="3214" y="3508"/>
+                </a:lnTo>
+                <a:lnTo>
+                  <a:pt x="3338" y="3470"/>
+                </a:lnTo>
+                <a:lnTo>
+                  <a:pt x="3461" y="3429"/>
+                </a:lnTo>
+                <a:lnTo>
+                  <a:pt x="3585" y="3386"/>
+                </a:lnTo>
+                <a:lnTo>
+                  <a:pt x="3708" y="3341"/>
+                </a:lnTo>
+                <a:lnTo>
+                  <a:pt x="3832" y="3294"/>
+                </a:lnTo>
+                <a:lnTo>
+                  <a:pt x="3955" y="3243"/>
+                </a:lnTo>
+                <a:lnTo>
+                  <a:pt x="4079" y="3190"/>
+                </a:lnTo>
+                <a:lnTo>
+                  <a:pt x="4203" y="3134"/>
+                </a:lnTo>
+                <a:lnTo>
+                  <a:pt x="4326" y="3074"/>
+                </a:lnTo>
+                <a:lnTo>
+                  <a:pt x="4450" y="3011"/>
+                </a:lnTo>
+                <a:lnTo>
+                  <a:pt x="4573" y="2944"/>
+                </a:lnTo>
+                <a:lnTo>
+                  <a:pt x="4697" y="2873"/>
+                </a:lnTo>
+                <a:lnTo>
+                  <a:pt x="4820" y="2798"/>
+                </a:lnTo>
+                <a:lnTo>
+                  <a:pt x="4944" y="2719"/>
+                </a:lnTo>
+                <a:lnTo>
+                  <a:pt x="5068" y="2635"/>
+                </a:lnTo>
+                <a:lnTo>
+                  <a:pt x="5191" y="2546"/>
+                </a:lnTo>
+                <a:lnTo>
+                  <a:pt x="5315" y="2451"/>
+                </a:lnTo>
+                <a:lnTo>
+                  <a:pt x="5438" y="2352"/>
+                </a:lnTo>
+                <a:lnTo>
+                  <a:pt x="5562" y="2247"/>
+                </a:lnTo>
+                <a:lnTo>
+                  <a:pt x="5685" y="2135"/>
+                </a:lnTo>
+                <a:lnTo>
+                  <a:pt x="5809" y="2018"/>
+                </a:lnTo>
+                <a:lnTo>
+                  <a:pt x="5933" y="1894"/>
+                </a:lnTo>
+                <a:lnTo>
+                  <a:pt x="6056" y="1763"/>
+                </a:lnTo>
+                <a:lnTo>
+                  <a:pt x="6180" y="1626"/>
+                </a:lnTo>
+                <a:lnTo>
+                  <a:pt x="6303" y="1480"/>
+                </a:lnTo>
+                <a:lnTo>
+                  <a:pt x="6427" y="1327"/>
+                </a:lnTo>
+                <a:lnTo>
+                  <a:pt x="6550" y="1166"/>
+                </a:lnTo>
+                <a:lnTo>
+                  <a:pt x="6674" y="996"/>
+                </a:lnTo>
+                <a:lnTo>
+                  <a:pt x="6798" y="817"/>
+                </a:lnTo>
+                <a:lnTo>
+                  <a:pt x="6921" y="628"/>
+                </a:lnTo>
+                <a:lnTo>
+                  <a:pt x="7045" y="429"/>
+                </a:lnTo>
+                <a:lnTo>
+                  <a:pt x="7168" y="220"/>
                 </a:lnTo>
                 <a:lnTo>
                   <a:pt x="7292" y="0"/>
                 </a:lnTo>
                 <a:lnTo>
-                  <a:pt x="7292" y="2648"/>
-                </a:lnTo>
-                <a:lnTo>
-                  <a:pt x="7168" y="2697"/>
-                </a:lnTo>
-                <a:lnTo>
-                  <a:pt x="7045" y="2746"/>
-                </a:lnTo>
-                <a:lnTo>
-                  <a:pt x="6921" y="2794"/>
-                </a:lnTo>
-                <a:lnTo>
-                  <a:pt x="6798" y="2840"/>
-                </a:lnTo>
-                <a:lnTo>
-                  <a:pt x="6674" y="2886"/>
-                </a:lnTo>
-                <a:lnTo>
-                  <a:pt x="6550" y="2932"/>
-                </a:lnTo>
-                <a:lnTo>
-                  <a:pt x="6427" y="2976"/>
-                </a:lnTo>
-                <a:lnTo>
-                  <a:pt x="6303" y="3020"/>
-                </a:lnTo>
-                <a:lnTo>
-                  <a:pt x="6180" y="3063"/>
-                </a:lnTo>
-                <a:lnTo>
-                  <a:pt x="6056" y="3106"/>
-                </a:lnTo>
-                <a:lnTo>
-                  <a:pt x="5933" y="3148"/>
-                </a:lnTo>
-                <a:lnTo>
-                  <a:pt x="5809" y="3189"/>
-                </a:lnTo>
-                <a:lnTo>
-                  <a:pt x="5685" y="3230"/>
-                </a:lnTo>
-                <a:lnTo>
-                  <a:pt x="5562" y="3270"/>
-                </a:lnTo>
-                <a:lnTo>
-                  <a:pt x="5438" y="3310"/>
-                </a:lnTo>
-                <a:lnTo>
-                  <a:pt x="5315" y="3349"/>
-                </a:lnTo>
-                <a:lnTo>
-                  <a:pt x="5191" y="3388"/>
-                </a:lnTo>
-                <a:lnTo>
-                  <a:pt x="5068" y="3426"/>
-                </a:lnTo>
-                <a:lnTo>
-                  <a:pt x="4944" y="3464"/>
-                </a:lnTo>
-                <a:lnTo>
-                  <a:pt x="4820" y="3502"/>
-                </a:lnTo>
-                <a:lnTo>
-                  <a:pt x="4697" y="3540"/>
-                </a:lnTo>
-                <a:lnTo>
-                  <a:pt x="4573" y="3576"/>
-                </a:lnTo>
-                <a:lnTo>
-                  <a:pt x="4450" y="3612"/>
-                </a:lnTo>
-                <a:lnTo>
-                  <a:pt x="4326" y="3648"/>
-                </a:lnTo>
-                <a:lnTo>
-                  <a:pt x="4203" y="3683"/>
-                </a:lnTo>
-                <a:lnTo>
-                  <a:pt x="4079" y="3718"/>
-                </a:lnTo>
-                <a:lnTo>
-                  <a:pt x="3955" y="3752"/>
-                </a:lnTo>
-                <a:lnTo>
-                  <a:pt x="3832" y="3786"/>
-                </a:lnTo>
-                <a:lnTo>
-                  <a:pt x="3708" y="3818"/>
-                </a:lnTo>
-                <a:lnTo>
-                  <a:pt x="3585" y="3851"/>
-                </a:lnTo>
-                <a:lnTo>
-                  <a:pt x="3461" y="3882"/>
-                </a:lnTo>
-                <a:lnTo>
-                  <a:pt x="3338" y="3913"/>
-                </a:lnTo>
-                <a:lnTo>
-                  <a:pt x="3214" y="3943"/>
-                </a:lnTo>
-                <a:lnTo>
-                  <a:pt x="3090" y="3972"/>
-                </a:lnTo>
-                <a:lnTo>
-                  <a:pt x="2967" y="4000"/>
-                </a:lnTo>
-                <a:lnTo>
-                  <a:pt x="2843" y="4027"/>
-                </a:lnTo>
-                <a:lnTo>
-                  <a:pt x="2720" y="4054"/>
-                </a:lnTo>
-                <a:lnTo>
-                  <a:pt x="2596" y="4079"/>
-                </a:lnTo>
-                <a:lnTo>
-                  <a:pt x="2473" y="4104"/>
-                </a:lnTo>
-                <a:lnTo>
-                  <a:pt x="2349" y="4128"/>
-                </a:lnTo>
-                <a:lnTo>
-                  <a:pt x="2224" y="4151"/>
-                </a:lnTo>
-                <a:lnTo>
-                  <a:pt x="2101" y="4173"/>
-                </a:lnTo>
-                <a:lnTo>
-                  <a:pt x="1977" y="4195"/>
-                </a:lnTo>
-                <a:lnTo>
-                  <a:pt x="1854" y="4215"/>
-                </a:lnTo>
-                <a:lnTo>
-                  <a:pt x="1730" y="4235"/>
-                </a:lnTo>
-                <a:lnTo>
-                  <a:pt x="1607" y="4254"/>
-                </a:lnTo>
-                <a:lnTo>
-                  <a:pt x="1483" y="4272"/>
-                </a:lnTo>
-                <a:lnTo>
-                  <a:pt x="1360" y="4289"/>
-                </a:lnTo>
-                <a:lnTo>
-                  <a:pt x="1236" y="4306"/>
-                </a:lnTo>
-                <a:lnTo>
-                  <a:pt x="1112" y="4322"/>
-                </a:lnTo>
-                <a:lnTo>
-                  <a:pt x="989" y="4337"/>
-                </a:lnTo>
-                <a:lnTo>
-                  <a:pt x="865" y="4352"/>
-                </a:lnTo>
-                <a:lnTo>
-                  <a:pt x="742" y="4365"/>
-                </a:lnTo>
-                <a:lnTo>
-                  <a:pt x="618" y="4379"/>
-                </a:lnTo>
-                <a:lnTo>
-                  <a:pt x="495" y="4392"/>
-                </a:lnTo>
-                <a:lnTo>
-                  <a:pt x="371" y="4404"/>
-                </a:lnTo>
-                <a:lnTo>
-                  <a:pt x="247" y="4415"/>
-                </a:lnTo>
-                <a:lnTo>
-                  <a:pt x="124" y="4426"/>
-                </a:lnTo>
-                <a:lnTo>
-                  <a:pt x="0" y="4437"/>
-                </a:lnTo>
-                <a:lnTo>
-                  <a:pt x="0" y="4033"/>
+                  <a:pt x="7292" y="2672"/>
+                </a:lnTo>
+                <a:lnTo>
+                  <a:pt x="7168" y="2724"/>
+                </a:lnTo>
+                <a:lnTo>
+                  <a:pt x="7045" y="2776"/>
+                </a:lnTo>
+                <a:lnTo>
+                  <a:pt x="6921" y="2826"/>
+                </a:lnTo>
+                <a:lnTo>
+                  <a:pt x="6798" y="2876"/>
+                </a:lnTo>
+                <a:lnTo>
+                  <a:pt x="6674" y="2924"/>
+                </a:lnTo>
+                <a:lnTo>
+                  <a:pt x="6550" y="2972"/>
+                </a:lnTo>
+                <a:lnTo>
+                  <a:pt x="6427" y="3018"/>
+                </a:lnTo>
+                <a:lnTo>
+                  <a:pt x="6303" y="3064"/>
+                </a:lnTo>
+                <a:lnTo>
+                  <a:pt x="6180" y="3110"/>
+                </a:lnTo>
+                <a:lnTo>
+                  <a:pt x="6056" y="3154"/>
+                </a:lnTo>
+                <a:lnTo>
+                  <a:pt x="5933" y="3198"/>
+                </a:lnTo>
+                <a:lnTo>
+                  <a:pt x="5809" y="3241"/>
+                </a:lnTo>
+                <a:lnTo>
+                  <a:pt x="5685" y="3283"/>
+                </a:lnTo>
+                <a:lnTo>
+                  <a:pt x="5562" y="3325"/>
+                </a:lnTo>
+                <a:lnTo>
+                  <a:pt x="5438" y="3366"/>
+                </a:lnTo>
+                <a:lnTo>
+                  <a:pt x="5315" y="3407"/>
+                </a:lnTo>
+                <a:lnTo>
+                  <a:pt x="5191" y="3447"/>
+                </a:lnTo>
+                <a:lnTo>
+                  <a:pt x="5068" y="3486"/>
+                </a:lnTo>
+                <a:lnTo>
+                  <a:pt x="4944" y="3525"/>
+                </a:lnTo>
+                <a:lnTo>
+                  <a:pt x="4820" y="3564"/>
+                </a:lnTo>
+                <a:lnTo>
+                  <a:pt x="4697" y="3601"/>
+                </a:lnTo>
+                <a:lnTo>
+                  <a:pt x="4573" y="3639"/>
+                </a:lnTo>
+                <a:lnTo>
+                  <a:pt x="4450" y="3676"/>
+                </a:lnTo>
+                <a:lnTo>
+                  <a:pt x="4326" y="3713"/>
+                </a:lnTo>
+                <a:lnTo>
+                  <a:pt x="4203" y="3749"/>
+                </a:lnTo>
+                <a:lnTo>
+                  <a:pt x="4079" y="3784"/>
+                </a:lnTo>
+                <a:lnTo>
+                  <a:pt x="3955" y="3818"/>
+                </a:lnTo>
+                <a:lnTo>
+                  <a:pt x="3832" y="3852"/>
+                </a:lnTo>
+                <a:lnTo>
+                  <a:pt x="3708" y="3885"/>
+                </a:lnTo>
+                <a:lnTo>
+                  <a:pt x="3585" y="3917"/>
+                </a:lnTo>
+                <a:lnTo>
+                  <a:pt x="3461" y="3949"/>
+                </a:lnTo>
+                <a:lnTo>
+                  <a:pt x="3338" y="3980"/>
+                </a:lnTo>
+                <a:lnTo>
+                  <a:pt x="3214" y="4010"/>
+                </a:lnTo>
+                <a:lnTo>
+                  <a:pt x="3090" y="4039"/>
+                </a:lnTo>
+                <a:lnTo>
+                  <a:pt x="2967" y="4067"/>
+                </a:lnTo>
+                <a:lnTo>
+                  <a:pt x="2843" y="4094"/>
+                </a:lnTo>
+                <a:lnTo>
+                  <a:pt x="2720" y="4120"/>
+                </a:lnTo>
+                <a:lnTo>
+                  <a:pt x="2596" y="4146"/>
+                </a:lnTo>
+                <a:lnTo>
+                  <a:pt x="2473" y="4170"/>
+                </a:lnTo>
+                <a:lnTo>
+                  <a:pt x="2349" y="4194"/>
+                </a:lnTo>
+                <a:lnTo>
+                  <a:pt x="2224" y="4217"/>
+                </a:lnTo>
+                <a:lnTo>
+                  <a:pt x="2101" y="4238"/>
+                </a:lnTo>
+                <a:lnTo>
+                  <a:pt x="1977" y="4259"/>
+                </a:lnTo>
+                <a:lnTo>
+                  <a:pt x="1854" y="4280"/>
+                </a:lnTo>
+                <a:lnTo>
+                  <a:pt x="1730" y="4299"/>
+                </a:lnTo>
+                <a:lnTo>
+                  <a:pt x="1607" y="4317"/>
+                </a:lnTo>
+                <a:lnTo>
+                  <a:pt x="1483" y="4335"/>
+                </a:lnTo>
+                <a:lnTo>
+                  <a:pt x="1360" y="4352"/>
+                </a:lnTo>
+                <a:lnTo>
+                  <a:pt x="1236" y="4368"/>
+                </a:lnTo>
+                <a:lnTo>
+                  <a:pt x="1112" y="4384"/>
+                </a:lnTo>
+                <a:lnTo>
+                  <a:pt x="989" y="4399"/>
+                </a:lnTo>
+                <a:lnTo>
+                  <a:pt x="865" y="4413"/>
+                </a:lnTo>
+                <a:lnTo>
+                  <a:pt x="742" y="4426"/>
+                </a:lnTo>
+                <a:lnTo>
+                  <a:pt x="618" y="4439"/>
+                </a:lnTo>
+                <a:lnTo>
+                  <a:pt x="495" y="4452"/>
+                </a:lnTo>
+                <a:lnTo>
+                  <a:pt x="371" y="4464"/>
+                </a:lnTo>
+                <a:lnTo>
+                  <a:pt x="247" y="4475"/>
+                </a:lnTo>
+                <a:lnTo>
+                  <a:pt x="124" y="4485"/>
+                </a:lnTo>
+                <a:lnTo>
+                  <a:pt x="0" y="4496"/>
+                </a:lnTo>
+                <a:lnTo>
+                  <a:pt x="0" y="4114"/>
                 </a:lnTo>
                 <a:close/>
               </a:path>
@@ -4983,8 +4983,8 @@
         </p:nvSpPr>
         <p:spPr>
           <a:xfrm>
-            <a:off x="491040" y="2918160"/>
-            <a:ext cx="2625120" cy="1256400"/>
+            <a:off x="491040" y="2912400"/>
+            <a:ext cx="2625120" cy="1265400"/>
           </a:xfrm>
           <a:custGeom>
             <a:avLst/>
@@ -4992,366 +4992,363 @@
             <a:ahLst/>
             <a:rect l="0" t="0" r="r" b="b"/>
             <a:pathLst>
-              <a:path w="7292" h="3490">
+              <a:path w="7292" h="3515">
                 <a:moveTo>
-                  <a:pt x="0" y="2923"/>
+                  <a:pt x="0" y="2952"/>
                 </a:moveTo>
                 <a:lnTo>
-                  <a:pt x="124" y="2905"/>
-                </a:lnTo>
-                <a:lnTo>
-                  <a:pt x="247" y="2886"/>
-                </a:lnTo>
-                <a:lnTo>
-                  <a:pt x="371" y="2866"/>
-                </a:lnTo>
-                <a:lnTo>
-                  <a:pt x="495" y="2847"/>
-                </a:lnTo>
-                <a:lnTo>
-                  <a:pt x="618" y="2827"/>
-                </a:lnTo>
-                <a:lnTo>
-                  <a:pt x="742" y="2806"/>
-                </a:lnTo>
-                <a:lnTo>
-                  <a:pt x="865" y="2785"/>
-                </a:lnTo>
-                <a:lnTo>
-                  <a:pt x="989" y="2764"/>
-                </a:lnTo>
-                <a:lnTo>
-                  <a:pt x="1112" y="2742"/>
-                </a:lnTo>
-                <a:lnTo>
-                  <a:pt x="1236" y="2719"/>
-                </a:lnTo>
-                <a:lnTo>
-                  <a:pt x="1360" y="2696"/>
-                </a:lnTo>
-                <a:lnTo>
-                  <a:pt x="1483" y="2673"/>
-                </a:lnTo>
-                <a:lnTo>
-                  <a:pt x="1607" y="2648"/>
-                </a:lnTo>
-                <a:lnTo>
-                  <a:pt x="1730" y="2624"/>
-                </a:lnTo>
-                <a:lnTo>
-                  <a:pt x="1854" y="2598"/>
-                </a:lnTo>
-                <a:lnTo>
-                  <a:pt x="1977" y="2572"/>
-                </a:lnTo>
-                <a:lnTo>
-                  <a:pt x="2101" y="2545"/>
-                </a:lnTo>
-                <a:lnTo>
-                  <a:pt x="2224" y="2517"/>
-                </a:lnTo>
-                <a:lnTo>
-                  <a:pt x="2349" y="2489"/>
-                </a:lnTo>
-                <a:lnTo>
-                  <a:pt x="2473" y="2460"/>
-                </a:lnTo>
-                <a:lnTo>
-                  <a:pt x="2596" y="2429"/>
-                </a:lnTo>
-                <a:lnTo>
-                  <a:pt x="2720" y="2398"/>
-                </a:lnTo>
-                <a:lnTo>
-                  <a:pt x="2843" y="2366"/>
-                </a:lnTo>
-                <a:lnTo>
-                  <a:pt x="2967" y="2333"/>
-                </a:lnTo>
-                <a:lnTo>
-                  <a:pt x="3090" y="2298"/>
-                </a:lnTo>
-                <a:lnTo>
-                  <a:pt x="3214" y="2263"/>
-                </a:lnTo>
-                <a:lnTo>
-                  <a:pt x="3338" y="2226"/>
-                </a:lnTo>
-                <a:lnTo>
-                  <a:pt x="3461" y="2188"/>
-                </a:lnTo>
-                <a:lnTo>
-                  <a:pt x="3585" y="2148"/>
-                </a:lnTo>
-                <a:lnTo>
-                  <a:pt x="3708" y="2107"/>
-                </a:lnTo>
-                <a:lnTo>
-                  <a:pt x="3832" y="2065"/>
-                </a:lnTo>
-                <a:lnTo>
-                  <a:pt x="3955" y="2021"/>
-                </a:lnTo>
-                <a:lnTo>
-                  <a:pt x="4079" y="1975"/>
-                </a:lnTo>
-                <a:lnTo>
-                  <a:pt x="4203" y="1928"/>
-                </a:lnTo>
-                <a:lnTo>
-                  <a:pt x="4326" y="1879"/>
-                </a:lnTo>
-                <a:lnTo>
-                  <a:pt x="4450" y="1828"/>
-                </a:lnTo>
-                <a:lnTo>
-                  <a:pt x="4573" y="1775"/>
-                </a:lnTo>
-                <a:lnTo>
-                  <a:pt x="4697" y="1720"/>
-                </a:lnTo>
-                <a:lnTo>
-                  <a:pt x="4820" y="1663"/>
-                </a:lnTo>
-                <a:lnTo>
-                  <a:pt x="4944" y="1604"/>
-                </a:lnTo>
-                <a:lnTo>
-                  <a:pt x="5068" y="1543"/>
-                </a:lnTo>
-                <a:lnTo>
-                  <a:pt x="5191" y="1480"/>
-                </a:lnTo>
-                <a:lnTo>
-                  <a:pt x="5315" y="1414"/>
-                </a:lnTo>
-                <a:lnTo>
-                  <a:pt x="5438" y="1346"/>
-                </a:lnTo>
-                <a:lnTo>
-                  <a:pt x="5562" y="1276"/>
-                </a:lnTo>
-                <a:lnTo>
-                  <a:pt x="5685" y="1203"/>
-                </a:lnTo>
-                <a:lnTo>
-                  <a:pt x="5809" y="1127"/>
-                </a:lnTo>
-                <a:lnTo>
-                  <a:pt x="5933" y="1050"/>
-                </a:lnTo>
-                <a:lnTo>
-                  <a:pt x="6056" y="969"/>
-                </a:lnTo>
-                <a:lnTo>
-                  <a:pt x="6180" y="886"/>
-                </a:lnTo>
-                <a:lnTo>
-                  <a:pt x="6303" y="799"/>
-                </a:lnTo>
-                <a:lnTo>
-                  <a:pt x="6427" y="710"/>
-                </a:lnTo>
-                <a:lnTo>
-                  <a:pt x="6550" y="618"/>
-                </a:lnTo>
-                <a:lnTo>
-                  <a:pt x="6674" y="523"/>
-                </a:lnTo>
-                <a:lnTo>
-                  <a:pt x="6798" y="425"/>
-                </a:lnTo>
-                <a:lnTo>
-                  <a:pt x="6921" y="323"/>
-                </a:lnTo>
-                <a:lnTo>
-                  <a:pt x="7045" y="219"/>
-                </a:lnTo>
-                <a:lnTo>
-                  <a:pt x="7168" y="111"/>
+                  <a:pt x="124" y="2933"/>
+                </a:lnTo>
+                <a:lnTo>
+                  <a:pt x="247" y="2914"/>
+                </a:lnTo>
+                <a:lnTo>
+                  <a:pt x="371" y="2895"/>
+                </a:lnTo>
+                <a:lnTo>
+                  <a:pt x="495" y="2875"/>
+                </a:lnTo>
+                <a:lnTo>
+                  <a:pt x="618" y="2855"/>
+                </a:lnTo>
+                <a:lnTo>
+                  <a:pt x="742" y="2834"/>
+                </a:lnTo>
+                <a:lnTo>
+                  <a:pt x="865" y="2813"/>
+                </a:lnTo>
+                <a:lnTo>
+                  <a:pt x="989" y="2792"/>
+                </a:lnTo>
+                <a:lnTo>
+                  <a:pt x="1112" y="2769"/>
+                </a:lnTo>
+                <a:lnTo>
+                  <a:pt x="1236" y="2747"/>
+                </a:lnTo>
+                <a:lnTo>
+                  <a:pt x="1360" y="2724"/>
+                </a:lnTo>
+                <a:lnTo>
+                  <a:pt x="1483" y="2700"/>
+                </a:lnTo>
+                <a:lnTo>
+                  <a:pt x="1607" y="2675"/>
+                </a:lnTo>
+                <a:lnTo>
+                  <a:pt x="1730" y="2651"/>
+                </a:lnTo>
+                <a:lnTo>
+                  <a:pt x="1854" y="2625"/>
+                </a:lnTo>
+                <a:lnTo>
+                  <a:pt x="1977" y="2598"/>
+                </a:lnTo>
+                <a:lnTo>
+                  <a:pt x="2101" y="2571"/>
+                </a:lnTo>
+                <a:lnTo>
+                  <a:pt x="2224" y="2543"/>
+                </a:lnTo>
+                <a:lnTo>
+                  <a:pt x="2349" y="2515"/>
+                </a:lnTo>
+                <a:lnTo>
+                  <a:pt x="2473" y="2485"/>
+                </a:lnTo>
+                <a:lnTo>
+                  <a:pt x="2596" y="2455"/>
+                </a:lnTo>
+                <a:lnTo>
+                  <a:pt x="2720" y="2423"/>
+                </a:lnTo>
+                <a:lnTo>
+                  <a:pt x="2843" y="2391"/>
+                </a:lnTo>
+                <a:lnTo>
+                  <a:pt x="2967" y="2357"/>
+                </a:lnTo>
+                <a:lnTo>
+                  <a:pt x="3090" y="2323"/>
+                </a:lnTo>
+                <a:lnTo>
+                  <a:pt x="3214" y="2287"/>
+                </a:lnTo>
+                <a:lnTo>
+                  <a:pt x="3338" y="2250"/>
+                </a:lnTo>
+                <a:lnTo>
+                  <a:pt x="3461" y="2211"/>
+                </a:lnTo>
+                <a:lnTo>
+                  <a:pt x="3585" y="2172"/>
+                </a:lnTo>
+                <a:lnTo>
+                  <a:pt x="3708" y="2130"/>
+                </a:lnTo>
+                <a:lnTo>
+                  <a:pt x="3832" y="2088"/>
+                </a:lnTo>
+                <a:lnTo>
+                  <a:pt x="3955" y="2043"/>
+                </a:lnTo>
+                <a:lnTo>
+                  <a:pt x="4079" y="1997"/>
+                </a:lnTo>
+                <a:lnTo>
+                  <a:pt x="4203" y="1949"/>
+                </a:lnTo>
+                <a:lnTo>
+                  <a:pt x="4326" y="1900"/>
+                </a:lnTo>
+                <a:lnTo>
+                  <a:pt x="4450" y="1848"/>
+                </a:lnTo>
+                <a:lnTo>
+                  <a:pt x="4573" y="1795"/>
+                </a:lnTo>
+                <a:lnTo>
+                  <a:pt x="4697" y="1740"/>
+                </a:lnTo>
+                <a:lnTo>
+                  <a:pt x="4820" y="1682"/>
+                </a:lnTo>
+                <a:lnTo>
+                  <a:pt x="4944" y="1623"/>
+                </a:lnTo>
+                <a:lnTo>
+                  <a:pt x="5068" y="1561"/>
+                </a:lnTo>
+                <a:lnTo>
+                  <a:pt x="5191" y="1497"/>
+                </a:lnTo>
+                <a:lnTo>
+                  <a:pt x="5315" y="1431"/>
+                </a:lnTo>
+                <a:lnTo>
+                  <a:pt x="5438" y="1362"/>
+                </a:lnTo>
+                <a:lnTo>
+                  <a:pt x="5562" y="1291"/>
+                </a:lnTo>
+                <a:lnTo>
+                  <a:pt x="5685" y="1217"/>
+                </a:lnTo>
+                <a:lnTo>
+                  <a:pt x="5809" y="1141"/>
+                </a:lnTo>
+                <a:lnTo>
+                  <a:pt x="5933" y="1062"/>
+                </a:lnTo>
+                <a:lnTo>
+                  <a:pt x="6056" y="981"/>
+                </a:lnTo>
+                <a:lnTo>
+                  <a:pt x="6180" y="897"/>
+                </a:lnTo>
+                <a:lnTo>
+                  <a:pt x="6303" y="809"/>
+                </a:lnTo>
+                <a:lnTo>
+                  <a:pt x="6427" y="719"/>
+                </a:lnTo>
+                <a:lnTo>
+                  <a:pt x="6550" y="625"/>
+                </a:lnTo>
+                <a:lnTo>
+                  <a:pt x="6674" y="529"/>
+                </a:lnTo>
+                <a:lnTo>
+                  <a:pt x="6798" y="430"/>
+                </a:lnTo>
+                <a:lnTo>
+                  <a:pt x="6921" y="328"/>
+                </a:lnTo>
+                <a:lnTo>
+                  <a:pt x="7045" y="222"/>
+                </a:lnTo>
+                <a:lnTo>
+                  <a:pt x="7168" y="113"/>
                 </a:lnTo>
                 <a:lnTo>
                   <a:pt x="7292" y="0"/>
                 </a:lnTo>
                 <a:lnTo>
-                  <a:pt x="7292" y="1753"/>
-                </a:lnTo>
-                <a:lnTo>
-                  <a:pt x="7168" y="1790"/>
-                </a:lnTo>
-                <a:lnTo>
-                  <a:pt x="7045" y="1827"/>
-                </a:lnTo>
-                <a:lnTo>
-                  <a:pt x="6921" y="1864"/>
-                </a:lnTo>
-                <a:lnTo>
-                  <a:pt x="6798" y="1900"/>
-                </a:lnTo>
-                <a:lnTo>
-                  <a:pt x="6674" y="1936"/>
-                </a:lnTo>
-                <a:lnTo>
-                  <a:pt x="6550" y="1972"/>
-                </a:lnTo>
-                <a:lnTo>
-                  <a:pt x="6427" y="2008"/>
-                </a:lnTo>
-                <a:lnTo>
-                  <a:pt x="6303" y="2043"/>
-                </a:lnTo>
-                <a:lnTo>
-                  <a:pt x="6180" y="2078"/>
-                </a:lnTo>
-                <a:lnTo>
-                  <a:pt x="5933" y="2148"/>
-                </a:lnTo>
-                <a:lnTo>
-                  <a:pt x="5809" y="2182"/>
-                </a:lnTo>
-                <a:lnTo>
-                  <a:pt x="5685" y="2216"/>
-                </a:lnTo>
-                <a:lnTo>
-                  <a:pt x="5562" y="2250"/>
-                </a:lnTo>
-                <a:lnTo>
-                  <a:pt x="5438" y="2284"/>
-                </a:lnTo>
-                <a:lnTo>
-                  <a:pt x="5315" y="2318"/>
-                </a:lnTo>
-                <a:lnTo>
-                  <a:pt x="5191" y="2351"/>
-                </a:lnTo>
-                <a:lnTo>
-                  <a:pt x="5068" y="2385"/>
-                </a:lnTo>
-                <a:lnTo>
-                  <a:pt x="4944" y="2418"/>
-                </a:lnTo>
-                <a:lnTo>
-                  <a:pt x="4820" y="2451"/>
-                </a:lnTo>
-                <a:lnTo>
-                  <a:pt x="4697" y="2484"/>
-                </a:lnTo>
-                <a:lnTo>
-                  <a:pt x="4573" y="2516"/>
-                </a:lnTo>
-                <a:lnTo>
-                  <a:pt x="4450" y="2549"/>
-                </a:lnTo>
-                <a:lnTo>
-                  <a:pt x="4326" y="2581"/>
-                </a:lnTo>
-                <a:lnTo>
-                  <a:pt x="4203" y="2614"/>
-                </a:lnTo>
-                <a:lnTo>
-                  <a:pt x="4079" y="2646"/>
-                </a:lnTo>
-                <a:lnTo>
-                  <a:pt x="3955" y="2678"/>
-                </a:lnTo>
-                <a:lnTo>
-                  <a:pt x="3832" y="2709"/>
-                </a:lnTo>
-                <a:lnTo>
-                  <a:pt x="3708" y="2741"/>
-                </a:lnTo>
-                <a:lnTo>
-                  <a:pt x="3585" y="2772"/>
-                </a:lnTo>
-                <a:lnTo>
-                  <a:pt x="3461" y="2803"/>
-                </a:lnTo>
-                <a:lnTo>
-                  <a:pt x="3338" y="2833"/>
-                </a:lnTo>
-                <a:lnTo>
-                  <a:pt x="3214" y="2863"/>
-                </a:lnTo>
-                <a:lnTo>
-                  <a:pt x="3090" y="2893"/>
-                </a:lnTo>
-                <a:lnTo>
-                  <a:pt x="2967" y="2923"/>
-                </a:lnTo>
-                <a:lnTo>
-                  <a:pt x="2843" y="2952"/>
-                </a:lnTo>
-                <a:lnTo>
-                  <a:pt x="2720" y="2981"/>
-                </a:lnTo>
-                <a:lnTo>
-                  <a:pt x="2596" y="3009"/>
-                </a:lnTo>
-                <a:lnTo>
-                  <a:pt x="2473" y="3037"/>
-                </a:lnTo>
-                <a:lnTo>
-                  <a:pt x="2349" y="3064"/>
-                </a:lnTo>
-                <a:lnTo>
-                  <a:pt x="2224" y="3091"/>
-                </a:lnTo>
-                <a:lnTo>
-                  <a:pt x="2101" y="3117"/>
-                </a:lnTo>
-                <a:lnTo>
-                  <a:pt x="1977" y="3143"/>
-                </a:lnTo>
-                <a:lnTo>
-                  <a:pt x="1854" y="3169"/>
-                </a:lnTo>
-                <a:lnTo>
-                  <a:pt x="1730" y="3194"/>
-                </a:lnTo>
-                <a:lnTo>
-                  <a:pt x="1607" y="3218"/>
-                </a:lnTo>
-                <a:lnTo>
-                  <a:pt x="1483" y="3242"/>
-                </a:lnTo>
-                <a:lnTo>
-                  <a:pt x="1360" y="3265"/>
-                </a:lnTo>
-                <a:lnTo>
-                  <a:pt x="1236" y="3288"/>
-                </a:lnTo>
-                <a:lnTo>
-                  <a:pt x="1112" y="3311"/>
-                </a:lnTo>
-                <a:lnTo>
-                  <a:pt x="989" y="3333"/>
-                </a:lnTo>
-                <a:lnTo>
-                  <a:pt x="865" y="3354"/>
-                </a:lnTo>
-                <a:lnTo>
-                  <a:pt x="742" y="3375"/>
-                </a:lnTo>
-                <a:lnTo>
-                  <a:pt x="618" y="3395"/>
-                </a:lnTo>
-                <a:lnTo>
-                  <a:pt x="495" y="3415"/>
-                </a:lnTo>
-                <a:lnTo>
-                  <a:pt x="371" y="3434"/>
-                </a:lnTo>
-                <a:lnTo>
-                  <a:pt x="247" y="3453"/>
-                </a:lnTo>
-                <a:lnTo>
-                  <a:pt x="124" y="3472"/>
-                </a:lnTo>
-                <a:lnTo>
-                  <a:pt x="0" y="3490"/>
-                </a:lnTo>
-                <a:lnTo>
-                  <a:pt x="0" y="2923"/>
+                  <a:pt x="7292" y="1764"/>
+                </a:lnTo>
+                <a:lnTo>
+                  <a:pt x="7168" y="1802"/>
+                </a:lnTo>
+                <a:lnTo>
+                  <a:pt x="7045" y="1840"/>
+                </a:lnTo>
+                <a:lnTo>
+                  <a:pt x="6921" y="1877"/>
+                </a:lnTo>
+                <a:lnTo>
+                  <a:pt x="6798" y="1914"/>
+                </a:lnTo>
+                <a:lnTo>
+                  <a:pt x="6674" y="1951"/>
+                </a:lnTo>
+                <a:lnTo>
+                  <a:pt x="6550" y="1987"/>
+                </a:lnTo>
+                <a:lnTo>
+                  <a:pt x="6427" y="2023"/>
+                </a:lnTo>
+                <a:lnTo>
+                  <a:pt x="6303" y="2059"/>
+                </a:lnTo>
+                <a:lnTo>
+                  <a:pt x="6180" y="2095"/>
+                </a:lnTo>
+                <a:lnTo>
+                  <a:pt x="6056" y="2130"/>
+                </a:lnTo>
+                <a:lnTo>
+                  <a:pt x="5933" y="2165"/>
+                </a:lnTo>
+                <a:lnTo>
+                  <a:pt x="5809" y="2200"/>
+                </a:lnTo>
+                <a:lnTo>
+                  <a:pt x="5685" y="2235"/>
+                </a:lnTo>
+                <a:lnTo>
+                  <a:pt x="5562" y="2269"/>
+                </a:lnTo>
+                <a:lnTo>
+                  <a:pt x="5438" y="2303"/>
+                </a:lnTo>
+                <a:lnTo>
+                  <a:pt x="5315" y="2337"/>
+                </a:lnTo>
+                <a:lnTo>
+                  <a:pt x="5191" y="2371"/>
+                </a:lnTo>
+                <a:lnTo>
+                  <a:pt x="5068" y="2405"/>
+                </a:lnTo>
+                <a:lnTo>
+                  <a:pt x="4944" y="2439"/>
+                </a:lnTo>
+                <a:lnTo>
+                  <a:pt x="4697" y="2505"/>
+                </a:lnTo>
+                <a:lnTo>
+                  <a:pt x="4573" y="2538"/>
+                </a:lnTo>
+                <a:lnTo>
+                  <a:pt x="4326" y="2604"/>
+                </a:lnTo>
+                <a:lnTo>
+                  <a:pt x="4203" y="2637"/>
+                </a:lnTo>
+                <a:lnTo>
+                  <a:pt x="4079" y="2669"/>
+                </a:lnTo>
+                <a:lnTo>
+                  <a:pt x="3955" y="2701"/>
+                </a:lnTo>
+                <a:lnTo>
+                  <a:pt x="3832" y="2733"/>
+                </a:lnTo>
+                <a:lnTo>
+                  <a:pt x="3708" y="2764"/>
+                </a:lnTo>
+                <a:lnTo>
+                  <a:pt x="3585" y="2796"/>
+                </a:lnTo>
+                <a:lnTo>
+                  <a:pt x="3461" y="2827"/>
+                </a:lnTo>
+                <a:lnTo>
+                  <a:pt x="3338" y="2858"/>
+                </a:lnTo>
+                <a:lnTo>
+                  <a:pt x="3214" y="2888"/>
+                </a:lnTo>
+                <a:lnTo>
+                  <a:pt x="3090" y="2918"/>
+                </a:lnTo>
+                <a:lnTo>
+                  <a:pt x="2967" y="2948"/>
+                </a:lnTo>
+                <a:lnTo>
+                  <a:pt x="2843" y="2977"/>
+                </a:lnTo>
+                <a:lnTo>
+                  <a:pt x="2720" y="3006"/>
+                </a:lnTo>
+                <a:lnTo>
+                  <a:pt x="2596" y="3034"/>
+                </a:lnTo>
+                <a:lnTo>
+                  <a:pt x="2473" y="3062"/>
+                </a:lnTo>
+                <a:lnTo>
+                  <a:pt x="2349" y="3089"/>
+                </a:lnTo>
+                <a:lnTo>
+                  <a:pt x="2224" y="3116"/>
+                </a:lnTo>
+                <a:lnTo>
+                  <a:pt x="2101" y="3143"/>
+                </a:lnTo>
+                <a:lnTo>
+                  <a:pt x="1977" y="3169"/>
+                </a:lnTo>
+                <a:lnTo>
+                  <a:pt x="1854" y="3194"/>
+                </a:lnTo>
+                <a:lnTo>
+                  <a:pt x="1730" y="3219"/>
+                </a:lnTo>
+                <a:lnTo>
+                  <a:pt x="1607" y="3243"/>
+                </a:lnTo>
+                <a:lnTo>
+                  <a:pt x="1483" y="3267"/>
+                </a:lnTo>
+                <a:lnTo>
+                  <a:pt x="1360" y="3291"/>
+                </a:lnTo>
+                <a:lnTo>
+                  <a:pt x="1236" y="3314"/>
+                </a:lnTo>
+                <a:lnTo>
+                  <a:pt x="1112" y="3336"/>
+                </a:lnTo>
+                <a:lnTo>
+                  <a:pt x="989" y="3358"/>
+                </a:lnTo>
+                <a:lnTo>
+                  <a:pt x="865" y="3379"/>
+                </a:lnTo>
+                <a:lnTo>
+                  <a:pt x="742" y="3400"/>
+                </a:lnTo>
+                <a:lnTo>
+                  <a:pt x="618" y="3420"/>
+                </a:lnTo>
+                <a:lnTo>
+                  <a:pt x="495" y="3440"/>
+                </a:lnTo>
+                <a:lnTo>
+                  <a:pt x="371" y="3459"/>
+                </a:lnTo>
+                <a:lnTo>
+                  <a:pt x="247" y="3478"/>
+                </a:lnTo>
+                <a:lnTo>
+                  <a:pt x="124" y="3497"/>
+                </a:lnTo>
+                <a:lnTo>
+                  <a:pt x="0" y="3515"/>
+                </a:lnTo>
+                <a:lnTo>
+                  <a:pt x="0" y="2952"/>
                 </a:lnTo>
                 <a:close/>
               </a:path>
@@ -5391,7 +5388,7 @@
         <p:spPr>
           <a:xfrm>
             <a:off x="491040" y="2692440"/>
-            <a:ext cx="2625120" cy="1190160"/>
+            <a:ext cx="2625120" cy="1152360"/>
           </a:xfrm>
           <a:custGeom>
             <a:avLst/>
@@ -5399,366 +5396,366 @@
             <a:ahLst/>
             <a:rect l="0" t="0" r="r" b="b"/>
             <a:pathLst>
-              <a:path w="7292" h="3306">
+              <a:path w="7292" h="3201">
                 <a:moveTo>
-                  <a:pt x="0" y="1182"/>
+                  <a:pt x="0" y="906"/>
                 </a:moveTo>
                 <a:lnTo>
-                  <a:pt x="124" y="1197"/>
-                </a:lnTo>
-                <a:lnTo>
-                  <a:pt x="247" y="1211"/>
-                </a:lnTo>
-                <a:lnTo>
-                  <a:pt x="371" y="1225"/>
-                </a:lnTo>
-                <a:lnTo>
-                  <a:pt x="495" y="1238"/>
-                </a:lnTo>
-                <a:lnTo>
-                  <a:pt x="618" y="1252"/>
-                </a:lnTo>
-                <a:lnTo>
-                  <a:pt x="742" y="1264"/>
-                </a:lnTo>
-                <a:lnTo>
-                  <a:pt x="865" y="1276"/>
-                </a:lnTo>
-                <a:lnTo>
-                  <a:pt x="989" y="1288"/>
-                </a:lnTo>
-                <a:lnTo>
-                  <a:pt x="1112" y="1299"/>
-                </a:lnTo>
-                <a:lnTo>
-                  <a:pt x="1236" y="1309"/>
-                </a:lnTo>
-                <a:lnTo>
-                  <a:pt x="1360" y="1319"/>
-                </a:lnTo>
-                <a:lnTo>
-                  <a:pt x="1483" y="1328"/>
-                </a:lnTo>
-                <a:lnTo>
-                  <a:pt x="1607" y="1336"/>
-                </a:lnTo>
-                <a:lnTo>
-                  <a:pt x="1730" y="1344"/>
-                </a:lnTo>
-                <a:lnTo>
-                  <a:pt x="1854" y="1351"/>
-                </a:lnTo>
-                <a:lnTo>
-                  <a:pt x="1977" y="1357"/>
-                </a:lnTo>
-                <a:lnTo>
-                  <a:pt x="2101" y="1362"/>
-                </a:lnTo>
-                <a:lnTo>
-                  <a:pt x="2224" y="1366"/>
-                </a:lnTo>
-                <a:lnTo>
-                  <a:pt x="2349" y="1369"/>
-                </a:lnTo>
-                <a:lnTo>
-                  <a:pt x="2473" y="1371"/>
-                </a:lnTo>
-                <a:lnTo>
-                  <a:pt x="2596" y="1371"/>
-                </a:lnTo>
-                <a:lnTo>
-                  <a:pt x="2720" y="1371"/>
-                </a:lnTo>
-                <a:lnTo>
-                  <a:pt x="2843" y="1368"/>
-                </a:lnTo>
-                <a:lnTo>
-                  <a:pt x="2967" y="1365"/>
-                </a:lnTo>
-                <a:lnTo>
-                  <a:pt x="3090" y="1360"/>
-                </a:lnTo>
-                <a:lnTo>
-                  <a:pt x="3214" y="1353"/>
-                </a:lnTo>
-                <a:lnTo>
-                  <a:pt x="3338" y="1345"/>
-                </a:lnTo>
-                <a:lnTo>
-                  <a:pt x="3461" y="1335"/>
-                </a:lnTo>
-                <a:lnTo>
-                  <a:pt x="3585" y="1323"/>
-                </a:lnTo>
-                <a:lnTo>
-                  <a:pt x="3708" y="1309"/>
-                </a:lnTo>
-                <a:lnTo>
-                  <a:pt x="3832" y="1293"/>
-                </a:lnTo>
-                <a:lnTo>
-                  <a:pt x="3955" y="1274"/>
-                </a:lnTo>
-                <a:lnTo>
-                  <a:pt x="4079" y="1254"/>
-                </a:lnTo>
-                <a:lnTo>
-                  <a:pt x="4203" y="1232"/>
-                </a:lnTo>
-                <a:lnTo>
-                  <a:pt x="4326" y="1207"/>
-                </a:lnTo>
-                <a:lnTo>
-                  <a:pt x="4450" y="1180"/>
-                </a:lnTo>
-                <a:lnTo>
-                  <a:pt x="4573" y="1151"/>
-                </a:lnTo>
-                <a:lnTo>
-                  <a:pt x="4697" y="1120"/>
-                </a:lnTo>
-                <a:lnTo>
-                  <a:pt x="4820" y="1086"/>
-                </a:lnTo>
-                <a:lnTo>
-                  <a:pt x="4944" y="1050"/>
-                </a:lnTo>
-                <a:lnTo>
-                  <a:pt x="5068" y="1013"/>
-                </a:lnTo>
-                <a:lnTo>
-                  <a:pt x="5191" y="973"/>
-                </a:lnTo>
-                <a:lnTo>
-                  <a:pt x="5315" y="931"/>
-                </a:lnTo>
-                <a:lnTo>
-                  <a:pt x="5438" y="886"/>
-                </a:lnTo>
-                <a:lnTo>
-                  <a:pt x="5562" y="840"/>
-                </a:lnTo>
-                <a:lnTo>
-                  <a:pt x="5685" y="792"/>
-                </a:lnTo>
-                <a:lnTo>
-                  <a:pt x="5809" y="741"/>
-                </a:lnTo>
-                <a:lnTo>
-                  <a:pt x="5933" y="689"/>
-                </a:lnTo>
-                <a:lnTo>
-                  <a:pt x="6056" y="636"/>
-                </a:lnTo>
-                <a:lnTo>
-                  <a:pt x="6180" y="580"/>
-                </a:lnTo>
-                <a:lnTo>
-                  <a:pt x="6303" y="522"/>
-                </a:lnTo>
-                <a:lnTo>
-                  <a:pt x="6427" y="463"/>
-                </a:lnTo>
-                <a:lnTo>
-                  <a:pt x="6550" y="402"/>
-                </a:lnTo>
-                <a:lnTo>
-                  <a:pt x="6674" y="340"/>
-                </a:lnTo>
-                <a:lnTo>
-                  <a:pt x="6798" y="275"/>
-                </a:lnTo>
-                <a:lnTo>
-                  <a:pt x="6921" y="209"/>
-                </a:lnTo>
-                <a:lnTo>
-                  <a:pt x="7045" y="141"/>
-                </a:lnTo>
-                <a:lnTo>
-                  <a:pt x="7168" y="71"/>
+                  <a:pt x="124" y="927"/>
+                </a:lnTo>
+                <a:lnTo>
+                  <a:pt x="247" y="948"/>
+                </a:lnTo>
+                <a:lnTo>
+                  <a:pt x="371" y="968"/>
+                </a:lnTo>
+                <a:lnTo>
+                  <a:pt x="495" y="988"/>
+                </a:lnTo>
+                <a:lnTo>
+                  <a:pt x="618" y="1007"/>
+                </a:lnTo>
+                <a:lnTo>
+                  <a:pt x="742" y="1025"/>
+                </a:lnTo>
+                <a:lnTo>
+                  <a:pt x="865" y="1043"/>
+                </a:lnTo>
+                <a:lnTo>
+                  <a:pt x="989" y="1061"/>
+                </a:lnTo>
+                <a:lnTo>
+                  <a:pt x="1112" y="1077"/>
+                </a:lnTo>
+                <a:lnTo>
+                  <a:pt x="1236" y="1093"/>
+                </a:lnTo>
+                <a:lnTo>
+                  <a:pt x="1360" y="1109"/>
+                </a:lnTo>
+                <a:lnTo>
+                  <a:pt x="1483" y="1123"/>
+                </a:lnTo>
+                <a:lnTo>
+                  <a:pt x="1607" y="1137"/>
+                </a:lnTo>
+                <a:lnTo>
+                  <a:pt x="1730" y="1150"/>
+                </a:lnTo>
+                <a:lnTo>
+                  <a:pt x="1854" y="1162"/>
+                </a:lnTo>
+                <a:lnTo>
+                  <a:pt x="1977" y="1173"/>
+                </a:lnTo>
+                <a:lnTo>
+                  <a:pt x="2101" y="1183"/>
+                </a:lnTo>
+                <a:lnTo>
+                  <a:pt x="2224" y="1192"/>
+                </a:lnTo>
+                <a:lnTo>
+                  <a:pt x="2349" y="1200"/>
+                </a:lnTo>
+                <a:lnTo>
+                  <a:pt x="2473" y="1207"/>
+                </a:lnTo>
+                <a:lnTo>
+                  <a:pt x="2596" y="1212"/>
+                </a:lnTo>
+                <a:lnTo>
+                  <a:pt x="2720" y="1216"/>
+                </a:lnTo>
+                <a:lnTo>
+                  <a:pt x="2843" y="1218"/>
+                </a:lnTo>
+                <a:lnTo>
+                  <a:pt x="2967" y="1219"/>
+                </a:lnTo>
+                <a:lnTo>
+                  <a:pt x="3090" y="1218"/>
+                </a:lnTo>
+                <a:lnTo>
+                  <a:pt x="3214" y="1216"/>
+                </a:lnTo>
+                <a:lnTo>
+                  <a:pt x="3338" y="1212"/>
+                </a:lnTo>
+                <a:lnTo>
+                  <a:pt x="3461" y="1205"/>
+                </a:lnTo>
+                <a:lnTo>
+                  <a:pt x="3585" y="1197"/>
+                </a:lnTo>
+                <a:lnTo>
+                  <a:pt x="3708" y="1187"/>
+                </a:lnTo>
+                <a:lnTo>
+                  <a:pt x="3832" y="1175"/>
+                </a:lnTo>
+                <a:lnTo>
+                  <a:pt x="3955" y="1161"/>
+                </a:lnTo>
+                <a:lnTo>
+                  <a:pt x="4079" y="1144"/>
+                </a:lnTo>
+                <a:lnTo>
+                  <a:pt x="4203" y="1125"/>
+                </a:lnTo>
+                <a:lnTo>
+                  <a:pt x="4326" y="1104"/>
+                </a:lnTo>
+                <a:lnTo>
+                  <a:pt x="4450" y="1081"/>
+                </a:lnTo>
+                <a:lnTo>
+                  <a:pt x="4573" y="1055"/>
+                </a:lnTo>
+                <a:lnTo>
+                  <a:pt x="4697" y="1028"/>
+                </a:lnTo>
+                <a:lnTo>
+                  <a:pt x="4820" y="998"/>
+                </a:lnTo>
+                <a:lnTo>
+                  <a:pt x="4944" y="966"/>
+                </a:lnTo>
+                <a:lnTo>
+                  <a:pt x="5068" y="932"/>
+                </a:lnTo>
+                <a:lnTo>
+                  <a:pt x="5191" y="895"/>
+                </a:lnTo>
+                <a:lnTo>
+                  <a:pt x="5315" y="857"/>
+                </a:lnTo>
+                <a:lnTo>
+                  <a:pt x="5438" y="817"/>
+                </a:lnTo>
+                <a:lnTo>
+                  <a:pt x="5562" y="775"/>
+                </a:lnTo>
+                <a:lnTo>
+                  <a:pt x="5685" y="731"/>
+                </a:lnTo>
+                <a:lnTo>
+                  <a:pt x="5809" y="685"/>
+                </a:lnTo>
+                <a:lnTo>
+                  <a:pt x="5933" y="637"/>
+                </a:lnTo>
+                <a:lnTo>
+                  <a:pt x="6056" y="587"/>
+                </a:lnTo>
+                <a:lnTo>
+                  <a:pt x="6180" y="536"/>
+                </a:lnTo>
+                <a:lnTo>
+                  <a:pt x="6303" y="482"/>
+                </a:lnTo>
+                <a:lnTo>
+                  <a:pt x="6427" y="427"/>
+                </a:lnTo>
+                <a:lnTo>
+                  <a:pt x="6550" y="371"/>
+                </a:lnTo>
+                <a:lnTo>
+                  <a:pt x="6674" y="313"/>
+                </a:lnTo>
+                <a:lnTo>
+                  <a:pt x="6798" y="253"/>
+                </a:lnTo>
+                <a:lnTo>
+                  <a:pt x="6921" y="192"/>
+                </a:lnTo>
+                <a:lnTo>
+                  <a:pt x="7045" y="130"/>
+                </a:lnTo>
+                <a:lnTo>
+                  <a:pt x="7168" y="65"/>
                 </a:lnTo>
                 <a:lnTo>
                   <a:pt x="7292" y="0"/>
                 </a:lnTo>
                 <a:lnTo>
-                  <a:pt x="7292" y="2583"/>
-                </a:lnTo>
-                <a:lnTo>
-                  <a:pt x="7168" y="2576"/>
-                </a:lnTo>
-                <a:lnTo>
-                  <a:pt x="7045" y="2569"/>
-                </a:lnTo>
-                <a:lnTo>
-                  <a:pt x="6921" y="2562"/>
-                </a:lnTo>
-                <a:lnTo>
-                  <a:pt x="6798" y="2555"/>
-                </a:lnTo>
-                <a:lnTo>
-                  <a:pt x="6674" y="2549"/>
-                </a:lnTo>
-                <a:lnTo>
-                  <a:pt x="6550" y="2543"/>
-                </a:lnTo>
-                <a:lnTo>
-                  <a:pt x="6427" y="2538"/>
-                </a:lnTo>
-                <a:lnTo>
-                  <a:pt x="6303" y="2533"/>
-                </a:lnTo>
-                <a:lnTo>
-                  <a:pt x="6180" y="2528"/>
-                </a:lnTo>
-                <a:lnTo>
-                  <a:pt x="6056" y="2525"/>
-                </a:lnTo>
-                <a:lnTo>
-                  <a:pt x="5933" y="2521"/>
-                </a:lnTo>
-                <a:lnTo>
-                  <a:pt x="5809" y="2519"/>
-                </a:lnTo>
-                <a:lnTo>
-                  <a:pt x="5685" y="2517"/>
-                </a:lnTo>
-                <a:lnTo>
-                  <a:pt x="5562" y="2516"/>
-                </a:lnTo>
-                <a:lnTo>
-                  <a:pt x="5438" y="2515"/>
-                </a:lnTo>
-                <a:lnTo>
-                  <a:pt x="5315" y="2516"/>
-                </a:lnTo>
-                <a:lnTo>
-                  <a:pt x="5191" y="2517"/>
-                </a:lnTo>
-                <a:lnTo>
-                  <a:pt x="5068" y="2520"/>
-                </a:lnTo>
-                <a:lnTo>
-                  <a:pt x="4944" y="2523"/>
-                </a:lnTo>
-                <a:lnTo>
-                  <a:pt x="4820" y="2528"/>
-                </a:lnTo>
-                <a:lnTo>
-                  <a:pt x="4697" y="2533"/>
-                </a:lnTo>
-                <a:lnTo>
-                  <a:pt x="4573" y="2540"/>
-                </a:lnTo>
-                <a:lnTo>
-                  <a:pt x="4450" y="2548"/>
-                </a:lnTo>
-                <a:lnTo>
-                  <a:pt x="4326" y="2557"/>
-                </a:lnTo>
-                <a:lnTo>
-                  <a:pt x="4203" y="2568"/>
-                </a:lnTo>
-                <a:lnTo>
-                  <a:pt x="4079" y="2579"/>
-                </a:lnTo>
-                <a:lnTo>
-                  <a:pt x="3955" y="2592"/>
-                </a:lnTo>
-                <a:lnTo>
-                  <a:pt x="3832" y="2606"/>
-                </a:lnTo>
-                <a:lnTo>
-                  <a:pt x="3708" y="2621"/>
-                </a:lnTo>
-                <a:lnTo>
-                  <a:pt x="3585" y="2637"/>
-                </a:lnTo>
-                <a:lnTo>
-                  <a:pt x="3461" y="2654"/>
-                </a:lnTo>
-                <a:lnTo>
-                  <a:pt x="3338" y="2673"/>
-                </a:lnTo>
-                <a:lnTo>
-                  <a:pt x="3214" y="2692"/>
-                </a:lnTo>
-                <a:lnTo>
-                  <a:pt x="3090" y="2712"/>
-                </a:lnTo>
-                <a:lnTo>
-                  <a:pt x="2967" y="2732"/>
-                </a:lnTo>
-                <a:lnTo>
-                  <a:pt x="2843" y="2754"/>
-                </a:lnTo>
-                <a:lnTo>
-                  <a:pt x="2720" y="2776"/>
-                </a:lnTo>
-                <a:lnTo>
-                  <a:pt x="2596" y="2799"/>
-                </a:lnTo>
-                <a:lnTo>
-                  <a:pt x="2473" y="2822"/>
-                </a:lnTo>
-                <a:lnTo>
-                  <a:pt x="2349" y="2845"/>
-                </a:lnTo>
-                <a:lnTo>
-                  <a:pt x="2224" y="2869"/>
-                </a:lnTo>
-                <a:lnTo>
-                  <a:pt x="2101" y="2893"/>
-                </a:lnTo>
-                <a:lnTo>
-                  <a:pt x="1977" y="2918"/>
-                </a:lnTo>
-                <a:lnTo>
-                  <a:pt x="1854" y="2942"/>
-                </a:lnTo>
-                <a:lnTo>
-                  <a:pt x="1730" y="2967"/>
-                </a:lnTo>
-                <a:lnTo>
-                  <a:pt x="1607" y="2992"/>
-                </a:lnTo>
-                <a:lnTo>
-                  <a:pt x="1483" y="3016"/>
-                </a:lnTo>
-                <a:lnTo>
-                  <a:pt x="1360" y="3041"/>
-                </a:lnTo>
-                <a:lnTo>
-                  <a:pt x="1236" y="3066"/>
-                </a:lnTo>
-                <a:lnTo>
-                  <a:pt x="1112" y="3091"/>
-                </a:lnTo>
-                <a:lnTo>
-                  <a:pt x="989" y="3115"/>
-                </a:lnTo>
-                <a:lnTo>
-                  <a:pt x="865" y="3140"/>
-                </a:lnTo>
-                <a:lnTo>
-                  <a:pt x="618" y="3188"/>
-                </a:lnTo>
-                <a:lnTo>
-                  <a:pt x="495" y="3212"/>
-                </a:lnTo>
-                <a:lnTo>
-                  <a:pt x="371" y="3236"/>
-                </a:lnTo>
-                <a:lnTo>
-                  <a:pt x="247" y="3259"/>
-                </a:lnTo>
-                <a:lnTo>
-                  <a:pt x="124" y="3283"/>
-                </a:lnTo>
-                <a:lnTo>
-                  <a:pt x="0" y="3306"/>
-                </a:lnTo>
-                <a:lnTo>
-                  <a:pt x="0" y="1182"/>
+                  <a:pt x="7292" y="2604"/>
+                </a:lnTo>
+                <a:lnTo>
+                  <a:pt x="7168" y="2593"/>
+                </a:lnTo>
+                <a:lnTo>
+                  <a:pt x="7045" y="2583"/>
+                </a:lnTo>
+                <a:lnTo>
+                  <a:pt x="6921" y="2573"/>
+                </a:lnTo>
+                <a:lnTo>
+                  <a:pt x="6798" y="2563"/>
+                </a:lnTo>
+                <a:lnTo>
+                  <a:pt x="6674" y="2554"/>
+                </a:lnTo>
+                <a:lnTo>
+                  <a:pt x="6550" y="2545"/>
+                </a:lnTo>
+                <a:lnTo>
+                  <a:pt x="6427" y="2537"/>
+                </a:lnTo>
+                <a:lnTo>
+                  <a:pt x="6303" y="2529"/>
+                </a:lnTo>
+                <a:lnTo>
+                  <a:pt x="6180" y="2521"/>
+                </a:lnTo>
+                <a:lnTo>
+                  <a:pt x="6056" y="2514"/>
+                </a:lnTo>
+                <a:lnTo>
+                  <a:pt x="5933" y="2508"/>
+                </a:lnTo>
+                <a:lnTo>
+                  <a:pt x="5809" y="2502"/>
+                </a:lnTo>
+                <a:lnTo>
+                  <a:pt x="5685" y="2497"/>
+                </a:lnTo>
+                <a:lnTo>
+                  <a:pt x="5562" y="2492"/>
+                </a:lnTo>
+                <a:lnTo>
+                  <a:pt x="5438" y="2489"/>
+                </a:lnTo>
+                <a:lnTo>
+                  <a:pt x="5315" y="2486"/>
+                </a:lnTo>
+                <a:lnTo>
+                  <a:pt x="5191" y="2484"/>
+                </a:lnTo>
+                <a:lnTo>
+                  <a:pt x="5068" y="2484"/>
+                </a:lnTo>
+                <a:lnTo>
+                  <a:pt x="4944" y="2484"/>
+                </a:lnTo>
+                <a:lnTo>
+                  <a:pt x="4820" y="2485"/>
+                </a:lnTo>
+                <a:lnTo>
+                  <a:pt x="4697" y="2488"/>
+                </a:lnTo>
+                <a:lnTo>
+                  <a:pt x="4573" y="2491"/>
+                </a:lnTo>
+                <a:lnTo>
+                  <a:pt x="4450" y="2496"/>
+                </a:lnTo>
+                <a:lnTo>
+                  <a:pt x="4326" y="2503"/>
+                </a:lnTo>
+                <a:lnTo>
+                  <a:pt x="4203" y="2510"/>
+                </a:lnTo>
+                <a:lnTo>
+                  <a:pt x="4079" y="2519"/>
+                </a:lnTo>
+                <a:lnTo>
+                  <a:pt x="3955" y="2529"/>
+                </a:lnTo>
+                <a:lnTo>
+                  <a:pt x="3832" y="2540"/>
+                </a:lnTo>
+                <a:lnTo>
+                  <a:pt x="3708" y="2553"/>
+                </a:lnTo>
+                <a:lnTo>
+                  <a:pt x="3585" y="2566"/>
+                </a:lnTo>
+                <a:lnTo>
+                  <a:pt x="3461" y="2581"/>
+                </a:lnTo>
+                <a:lnTo>
+                  <a:pt x="3338" y="2597"/>
+                </a:lnTo>
+                <a:lnTo>
+                  <a:pt x="3214" y="2614"/>
+                </a:lnTo>
+                <a:lnTo>
+                  <a:pt x="3090" y="2632"/>
+                </a:lnTo>
+                <a:lnTo>
+                  <a:pt x="2967" y="2651"/>
+                </a:lnTo>
+                <a:lnTo>
+                  <a:pt x="2843" y="2670"/>
+                </a:lnTo>
+                <a:lnTo>
+                  <a:pt x="2720" y="2691"/>
+                </a:lnTo>
+                <a:lnTo>
+                  <a:pt x="2596" y="2712"/>
+                </a:lnTo>
+                <a:lnTo>
+                  <a:pt x="2473" y="2733"/>
+                </a:lnTo>
+                <a:lnTo>
+                  <a:pt x="2349" y="2755"/>
+                </a:lnTo>
+                <a:lnTo>
+                  <a:pt x="2224" y="2778"/>
+                </a:lnTo>
+                <a:lnTo>
+                  <a:pt x="2101" y="2801"/>
+                </a:lnTo>
+                <a:lnTo>
+                  <a:pt x="1977" y="2824"/>
+                </a:lnTo>
+                <a:lnTo>
+                  <a:pt x="1854" y="2847"/>
+                </a:lnTo>
+                <a:lnTo>
+                  <a:pt x="1730" y="2871"/>
+                </a:lnTo>
+                <a:lnTo>
+                  <a:pt x="1607" y="2895"/>
+                </a:lnTo>
+                <a:lnTo>
+                  <a:pt x="1483" y="2918"/>
+                </a:lnTo>
+                <a:lnTo>
+                  <a:pt x="1360" y="2942"/>
+                </a:lnTo>
+                <a:lnTo>
+                  <a:pt x="1236" y="2966"/>
+                </a:lnTo>
+                <a:lnTo>
+                  <a:pt x="1112" y="2990"/>
+                </a:lnTo>
+                <a:lnTo>
+                  <a:pt x="989" y="3014"/>
+                </a:lnTo>
+                <a:lnTo>
+                  <a:pt x="865" y="3038"/>
+                </a:lnTo>
+                <a:lnTo>
+                  <a:pt x="742" y="3062"/>
+                </a:lnTo>
+                <a:lnTo>
+                  <a:pt x="618" y="3085"/>
+                </a:lnTo>
+                <a:lnTo>
+                  <a:pt x="495" y="3109"/>
+                </a:lnTo>
+                <a:lnTo>
+                  <a:pt x="247" y="3155"/>
+                </a:lnTo>
+                <a:lnTo>
+                  <a:pt x="124" y="3178"/>
+                </a:lnTo>
+                <a:lnTo>
+                  <a:pt x="0" y="3201"/>
+                </a:lnTo>
+                <a:lnTo>
+                  <a:pt x="0" y="906"/>
                 </a:lnTo>
                 <a:close/>
               </a:path>
@@ -5797,8 +5794,8 @@
         </p:nvSpPr>
         <p:spPr>
           <a:xfrm>
-            <a:off x="491040" y="3303000"/>
-            <a:ext cx="2625120" cy="968040"/>
+            <a:off x="491040" y="3291480"/>
+            <a:ext cx="2625120" cy="987120"/>
           </a:xfrm>
           <a:custGeom>
             <a:avLst/>
@@ -5806,183 +5803,183 @@
             <a:ahLst/>
             <a:rect l="0" t="0" r="r" b="b"/>
             <a:pathLst>
-              <a:path fill="none" w="7292" h="2689">
+              <a:path fill="none" w="7292" h="2742">
                 <a:moveTo>
-                  <a:pt x="0" y="2689"/>
+                  <a:pt x="0" y="2742"/>
                 </a:moveTo>
                 <a:lnTo>
-                  <a:pt x="124" y="2676"/>
-                </a:lnTo>
-                <a:lnTo>
-                  <a:pt x="247" y="2662"/>
-                </a:lnTo>
-                <a:lnTo>
-                  <a:pt x="371" y="2647"/>
-                </a:lnTo>
-                <a:lnTo>
-                  <a:pt x="495" y="2633"/>
-                </a:lnTo>
-                <a:lnTo>
-                  <a:pt x="618" y="2617"/>
-                </a:lnTo>
-                <a:lnTo>
-                  <a:pt x="742" y="2601"/>
-                </a:lnTo>
-                <a:lnTo>
-                  <a:pt x="865" y="2584"/>
-                </a:lnTo>
-                <a:lnTo>
-                  <a:pt x="989" y="2567"/>
-                </a:lnTo>
-                <a:lnTo>
-                  <a:pt x="1112" y="2549"/>
-                </a:lnTo>
-                <a:lnTo>
-                  <a:pt x="1236" y="2531"/>
-                </a:lnTo>
-                <a:lnTo>
-                  <a:pt x="1360" y="2512"/>
-                </a:lnTo>
-                <a:lnTo>
-                  <a:pt x="1483" y="2492"/>
-                </a:lnTo>
-                <a:lnTo>
-                  <a:pt x="1607" y="2471"/>
-                </a:lnTo>
-                <a:lnTo>
-                  <a:pt x="1730" y="2450"/>
-                </a:lnTo>
-                <a:lnTo>
-                  <a:pt x="1854" y="2427"/>
-                </a:lnTo>
-                <a:lnTo>
-                  <a:pt x="1977" y="2404"/>
-                </a:lnTo>
-                <a:lnTo>
-                  <a:pt x="2101" y="2381"/>
-                </a:lnTo>
-                <a:lnTo>
-                  <a:pt x="2224" y="2356"/>
-                </a:lnTo>
-                <a:lnTo>
-                  <a:pt x="2349" y="2330"/>
-                </a:lnTo>
-                <a:lnTo>
-                  <a:pt x="2473" y="2304"/>
-                </a:lnTo>
-                <a:lnTo>
-                  <a:pt x="2596" y="2276"/>
-                </a:lnTo>
-                <a:lnTo>
-                  <a:pt x="2720" y="2248"/>
-                </a:lnTo>
-                <a:lnTo>
-                  <a:pt x="2843" y="2218"/>
-                </a:lnTo>
-                <a:lnTo>
-                  <a:pt x="2967" y="2188"/>
-                </a:lnTo>
-                <a:lnTo>
-                  <a:pt x="3090" y="2156"/>
-                </a:lnTo>
-                <a:lnTo>
-                  <a:pt x="3214" y="2123"/>
-                </a:lnTo>
-                <a:lnTo>
-                  <a:pt x="3338" y="2089"/>
-                </a:lnTo>
-                <a:lnTo>
-                  <a:pt x="3461" y="2053"/>
-                </a:lnTo>
-                <a:lnTo>
-                  <a:pt x="3585" y="2017"/>
-                </a:lnTo>
-                <a:lnTo>
-                  <a:pt x="3708" y="1979"/>
-                </a:lnTo>
-                <a:lnTo>
-                  <a:pt x="3832" y="1939"/>
-                </a:lnTo>
-                <a:lnTo>
-                  <a:pt x="3955" y="1898"/>
-                </a:lnTo>
-                <a:lnTo>
-                  <a:pt x="4079" y="1856"/>
-                </a:lnTo>
-                <a:lnTo>
-                  <a:pt x="4203" y="1812"/>
-                </a:lnTo>
-                <a:lnTo>
-                  <a:pt x="4326" y="1767"/>
-                </a:lnTo>
-                <a:lnTo>
-                  <a:pt x="4450" y="1719"/>
-                </a:lnTo>
-                <a:lnTo>
-                  <a:pt x="4573" y="1670"/>
-                </a:lnTo>
-                <a:lnTo>
-                  <a:pt x="4697" y="1620"/>
-                </a:lnTo>
-                <a:lnTo>
-                  <a:pt x="4820" y="1567"/>
-                </a:lnTo>
-                <a:lnTo>
-                  <a:pt x="4944" y="1513"/>
-                </a:lnTo>
-                <a:lnTo>
-                  <a:pt x="5068" y="1456"/>
-                </a:lnTo>
-                <a:lnTo>
-                  <a:pt x="5191" y="1398"/>
-                </a:lnTo>
-                <a:lnTo>
-                  <a:pt x="5315" y="1337"/>
-                </a:lnTo>
-                <a:lnTo>
-                  <a:pt x="5438" y="1274"/>
-                </a:lnTo>
-                <a:lnTo>
-                  <a:pt x="5562" y="1209"/>
-                </a:lnTo>
-                <a:lnTo>
-                  <a:pt x="5685" y="1141"/>
-                </a:lnTo>
-                <a:lnTo>
-                  <a:pt x="5809" y="1071"/>
-                </a:lnTo>
-                <a:lnTo>
-                  <a:pt x="5933" y="999"/>
-                </a:lnTo>
-                <a:lnTo>
-                  <a:pt x="6056" y="923"/>
-                </a:lnTo>
-                <a:lnTo>
-                  <a:pt x="6180" y="845"/>
-                </a:lnTo>
-                <a:lnTo>
-                  <a:pt x="6303" y="764"/>
-                </a:lnTo>
-                <a:lnTo>
-                  <a:pt x="6427" y="681"/>
-                </a:lnTo>
-                <a:lnTo>
-                  <a:pt x="6550" y="594"/>
-                </a:lnTo>
-                <a:lnTo>
-                  <a:pt x="6674" y="503"/>
-                </a:lnTo>
-                <a:lnTo>
-                  <a:pt x="6798" y="410"/>
-                </a:lnTo>
-                <a:lnTo>
-                  <a:pt x="6921" y="313"/>
-                </a:lnTo>
-                <a:lnTo>
-                  <a:pt x="7045" y="212"/>
-                </a:lnTo>
-                <a:lnTo>
-                  <a:pt x="7168" y="108"/>
+                  <a:pt x="124" y="2729"/>
+                </a:lnTo>
+                <a:lnTo>
+                  <a:pt x="247" y="2716"/>
+                </a:lnTo>
+                <a:lnTo>
+                  <a:pt x="371" y="2702"/>
+                </a:lnTo>
+                <a:lnTo>
+                  <a:pt x="495" y="2687"/>
+                </a:lnTo>
+                <a:lnTo>
+                  <a:pt x="618" y="2672"/>
+                </a:lnTo>
+                <a:lnTo>
+                  <a:pt x="742" y="2656"/>
+                </a:lnTo>
+                <a:lnTo>
+                  <a:pt x="865" y="2640"/>
+                </a:lnTo>
+                <a:lnTo>
+                  <a:pt x="989" y="2623"/>
+                </a:lnTo>
+                <a:lnTo>
+                  <a:pt x="1112" y="2605"/>
+                </a:lnTo>
+                <a:lnTo>
+                  <a:pt x="1236" y="2587"/>
+                </a:lnTo>
+                <a:lnTo>
+                  <a:pt x="1360" y="2568"/>
+                </a:lnTo>
+                <a:lnTo>
+                  <a:pt x="1483" y="2549"/>
+                </a:lnTo>
+                <a:lnTo>
+                  <a:pt x="1607" y="2528"/>
+                </a:lnTo>
+                <a:lnTo>
+                  <a:pt x="1730" y="2507"/>
+                </a:lnTo>
+                <a:lnTo>
+                  <a:pt x="1854" y="2485"/>
+                </a:lnTo>
+                <a:lnTo>
+                  <a:pt x="1977" y="2462"/>
+                </a:lnTo>
+                <a:lnTo>
+                  <a:pt x="2101" y="2439"/>
+                </a:lnTo>
+                <a:lnTo>
+                  <a:pt x="2224" y="2414"/>
+                </a:lnTo>
+                <a:lnTo>
+                  <a:pt x="2349" y="2389"/>
+                </a:lnTo>
+                <a:lnTo>
+                  <a:pt x="2473" y="2362"/>
+                </a:lnTo>
+                <a:lnTo>
+                  <a:pt x="2596" y="2335"/>
+                </a:lnTo>
+                <a:lnTo>
+                  <a:pt x="2720" y="2306"/>
+                </a:lnTo>
+                <a:lnTo>
+                  <a:pt x="2843" y="2277"/>
+                </a:lnTo>
+                <a:lnTo>
+                  <a:pt x="2967" y="2246"/>
+                </a:lnTo>
+                <a:lnTo>
+                  <a:pt x="3090" y="2214"/>
+                </a:lnTo>
+                <a:lnTo>
+                  <a:pt x="3214" y="2181"/>
+                </a:lnTo>
+                <a:lnTo>
+                  <a:pt x="3338" y="2147"/>
+                </a:lnTo>
+                <a:lnTo>
+                  <a:pt x="3461" y="2111"/>
+                </a:lnTo>
+                <a:lnTo>
+                  <a:pt x="3585" y="2074"/>
+                </a:lnTo>
+                <a:lnTo>
+                  <a:pt x="3708" y="2036"/>
+                </a:lnTo>
+                <a:lnTo>
+                  <a:pt x="3832" y="1996"/>
+                </a:lnTo>
+                <a:lnTo>
+                  <a:pt x="3955" y="1955"/>
+                </a:lnTo>
+                <a:lnTo>
+                  <a:pt x="4079" y="1912"/>
+                </a:lnTo>
+                <a:lnTo>
+                  <a:pt x="4203" y="1868"/>
+                </a:lnTo>
+                <a:lnTo>
+                  <a:pt x="4326" y="1822"/>
+                </a:lnTo>
+                <a:lnTo>
+                  <a:pt x="4450" y="1774"/>
+                </a:lnTo>
+                <a:lnTo>
+                  <a:pt x="4573" y="1724"/>
+                </a:lnTo>
+                <a:lnTo>
+                  <a:pt x="4697" y="1672"/>
+                </a:lnTo>
+                <a:lnTo>
+                  <a:pt x="4820" y="1619"/>
+                </a:lnTo>
+                <a:lnTo>
+                  <a:pt x="4944" y="1563"/>
+                </a:lnTo>
+                <a:lnTo>
+                  <a:pt x="5068" y="1506"/>
+                </a:lnTo>
+                <a:lnTo>
+                  <a:pt x="5191" y="1446"/>
+                </a:lnTo>
+                <a:lnTo>
+                  <a:pt x="5315" y="1384"/>
+                </a:lnTo>
+                <a:lnTo>
+                  <a:pt x="5438" y="1319"/>
+                </a:lnTo>
+                <a:lnTo>
+                  <a:pt x="5562" y="1252"/>
+                </a:lnTo>
+                <a:lnTo>
+                  <a:pt x="5685" y="1183"/>
+                </a:lnTo>
+                <a:lnTo>
+                  <a:pt x="5809" y="1111"/>
+                </a:lnTo>
+                <a:lnTo>
+                  <a:pt x="5933" y="1036"/>
+                </a:lnTo>
+                <a:lnTo>
+                  <a:pt x="6056" y="958"/>
+                </a:lnTo>
+                <a:lnTo>
+                  <a:pt x="6180" y="878"/>
+                </a:lnTo>
+                <a:lnTo>
+                  <a:pt x="6303" y="794"/>
+                </a:lnTo>
+                <a:lnTo>
+                  <a:pt x="6427" y="707"/>
+                </a:lnTo>
+                <a:lnTo>
+                  <a:pt x="6550" y="617"/>
+                </a:lnTo>
+                <a:lnTo>
+                  <a:pt x="6674" y="524"/>
+                </a:lnTo>
+                <a:lnTo>
+                  <a:pt x="6798" y="426"/>
+                </a:lnTo>
+                <a:lnTo>
+                  <a:pt x="6921" y="325"/>
+                </a:lnTo>
+                <a:lnTo>
+                  <a:pt x="7045" y="221"/>
+                </a:lnTo>
+                <a:lnTo>
+                  <a:pt x="7168" y="113"/>
                 </a:lnTo>
                 <a:lnTo>
                   <a:pt x="7292" y="0"/>
@@ -6021,8 +6018,8 @@
         </p:nvSpPr>
         <p:spPr>
           <a:xfrm>
-            <a:off x="491040" y="3276720"/>
-            <a:ext cx="2625120" cy="811800"/>
+            <a:off x="491040" y="3273480"/>
+            <a:ext cx="2625120" cy="819000"/>
           </a:xfrm>
           <a:custGeom>
             <a:avLst/>
@@ -6030,183 +6027,183 @@
             <a:ahLst/>
             <a:rect l="0" t="0" r="r" b="b"/>
             <a:pathLst>
-              <a:path fill="none" w="7292" h="2255">
+              <a:path fill="none" w="7292" h="2275">
                 <a:moveTo>
-                  <a:pt x="0" y="2255"/>
+                  <a:pt x="0" y="2275"/>
                 </a:moveTo>
                 <a:lnTo>
-                  <a:pt x="124" y="2236"/>
-                </a:lnTo>
-                <a:lnTo>
-                  <a:pt x="247" y="2217"/>
-                </a:lnTo>
-                <a:lnTo>
-                  <a:pt x="371" y="2197"/>
-                </a:lnTo>
-                <a:lnTo>
-                  <a:pt x="495" y="2176"/>
-                </a:lnTo>
-                <a:lnTo>
-                  <a:pt x="618" y="2156"/>
-                </a:lnTo>
-                <a:lnTo>
-                  <a:pt x="742" y="2134"/>
-                </a:lnTo>
-                <a:lnTo>
-                  <a:pt x="865" y="2113"/>
-                </a:lnTo>
-                <a:lnTo>
-                  <a:pt x="989" y="2090"/>
-                </a:lnTo>
-                <a:lnTo>
-                  <a:pt x="1112" y="2068"/>
-                </a:lnTo>
-                <a:lnTo>
-                  <a:pt x="1236" y="2044"/>
-                </a:lnTo>
-                <a:lnTo>
-                  <a:pt x="1360" y="2021"/>
-                </a:lnTo>
-                <a:lnTo>
-                  <a:pt x="1483" y="1997"/>
-                </a:lnTo>
-                <a:lnTo>
-                  <a:pt x="1607" y="1972"/>
-                </a:lnTo>
-                <a:lnTo>
-                  <a:pt x="1730" y="1947"/>
-                </a:lnTo>
-                <a:lnTo>
-                  <a:pt x="1854" y="1921"/>
-                </a:lnTo>
-                <a:lnTo>
-                  <a:pt x="1977" y="1894"/>
-                </a:lnTo>
-                <a:lnTo>
-                  <a:pt x="2101" y="1867"/>
-                </a:lnTo>
-                <a:lnTo>
-                  <a:pt x="2224" y="1840"/>
-                </a:lnTo>
-                <a:lnTo>
-                  <a:pt x="2349" y="1811"/>
-                </a:lnTo>
-                <a:lnTo>
-                  <a:pt x="2473" y="1783"/>
-                </a:lnTo>
-                <a:lnTo>
-                  <a:pt x="2596" y="1753"/>
-                </a:lnTo>
-                <a:lnTo>
-                  <a:pt x="2720" y="1723"/>
-                </a:lnTo>
-                <a:lnTo>
-                  <a:pt x="2843" y="1693"/>
-                </a:lnTo>
-                <a:lnTo>
-                  <a:pt x="2967" y="1661"/>
-                </a:lnTo>
-                <a:lnTo>
-                  <a:pt x="3090" y="1629"/>
-                </a:lnTo>
-                <a:lnTo>
-                  <a:pt x="3214" y="1596"/>
-                </a:lnTo>
-                <a:lnTo>
-                  <a:pt x="3338" y="1563"/>
-                </a:lnTo>
-                <a:lnTo>
-                  <a:pt x="3461" y="1529"/>
-                </a:lnTo>
-                <a:lnTo>
-                  <a:pt x="3585" y="1494"/>
-                </a:lnTo>
-                <a:lnTo>
-                  <a:pt x="3708" y="1458"/>
-                </a:lnTo>
-                <a:lnTo>
-                  <a:pt x="3832" y="1421"/>
-                </a:lnTo>
-                <a:lnTo>
-                  <a:pt x="3955" y="1384"/>
-                </a:lnTo>
-                <a:lnTo>
-                  <a:pt x="4079" y="1346"/>
-                </a:lnTo>
-                <a:lnTo>
-                  <a:pt x="4203" y="1307"/>
-                </a:lnTo>
-                <a:lnTo>
-                  <a:pt x="4326" y="1267"/>
-                </a:lnTo>
-                <a:lnTo>
-                  <a:pt x="4450" y="1226"/>
-                </a:lnTo>
-                <a:lnTo>
-                  <a:pt x="4573" y="1185"/>
-                </a:lnTo>
-                <a:lnTo>
-                  <a:pt x="4697" y="1142"/>
-                </a:lnTo>
-                <a:lnTo>
-                  <a:pt x="4820" y="1099"/>
-                </a:lnTo>
-                <a:lnTo>
-                  <a:pt x="4944" y="1055"/>
-                </a:lnTo>
-                <a:lnTo>
-                  <a:pt x="5068" y="1008"/>
-                </a:lnTo>
-                <a:lnTo>
-                  <a:pt x="5191" y="962"/>
-                </a:lnTo>
-                <a:lnTo>
-                  <a:pt x="5315" y="914"/>
-                </a:lnTo>
-                <a:lnTo>
-                  <a:pt x="5438" y="866"/>
-                </a:lnTo>
-                <a:lnTo>
-                  <a:pt x="5562" y="817"/>
-                </a:lnTo>
-                <a:lnTo>
-                  <a:pt x="5685" y="766"/>
-                </a:lnTo>
-                <a:lnTo>
-                  <a:pt x="5809" y="714"/>
-                </a:lnTo>
-                <a:lnTo>
-                  <a:pt x="5933" y="662"/>
-                </a:lnTo>
-                <a:lnTo>
-                  <a:pt x="6056" y="608"/>
-                </a:lnTo>
-                <a:lnTo>
-                  <a:pt x="6180" y="553"/>
-                </a:lnTo>
-                <a:lnTo>
-                  <a:pt x="6303" y="497"/>
-                </a:lnTo>
-                <a:lnTo>
-                  <a:pt x="6427" y="439"/>
-                </a:lnTo>
-                <a:lnTo>
-                  <a:pt x="6550" y="380"/>
-                </a:lnTo>
-                <a:lnTo>
-                  <a:pt x="6674" y="320"/>
-                </a:lnTo>
-                <a:lnTo>
-                  <a:pt x="6798" y="259"/>
-                </a:lnTo>
-                <a:lnTo>
-                  <a:pt x="6921" y="196"/>
-                </a:lnTo>
-                <a:lnTo>
-                  <a:pt x="7045" y="132"/>
-                </a:lnTo>
-                <a:lnTo>
-                  <a:pt x="7168" y="67"/>
+                  <a:pt x="124" y="2256"/>
+                </a:lnTo>
+                <a:lnTo>
+                  <a:pt x="247" y="2236"/>
+                </a:lnTo>
+                <a:lnTo>
+                  <a:pt x="371" y="2216"/>
+                </a:lnTo>
+                <a:lnTo>
+                  <a:pt x="495" y="2196"/>
+                </a:lnTo>
+                <a:lnTo>
+                  <a:pt x="618" y="2175"/>
+                </a:lnTo>
+                <a:lnTo>
+                  <a:pt x="742" y="2154"/>
+                </a:lnTo>
+                <a:lnTo>
+                  <a:pt x="865" y="2132"/>
+                </a:lnTo>
+                <a:lnTo>
+                  <a:pt x="989" y="2110"/>
+                </a:lnTo>
+                <a:lnTo>
+                  <a:pt x="1112" y="2087"/>
+                </a:lnTo>
+                <a:lnTo>
+                  <a:pt x="1236" y="2064"/>
+                </a:lnTo>
+                <a:lnTo>
+                  <a:pt x="1360" y="2040"/>
+                </a:lnTo>
+                <a:lnTo>
+                  <a:pt x="1483" y="2016"/>
+                </a:lnTo>
+                <a:lnTo>
+                  <a:pt x="1607" y="1991"/>
+                </a:lnTo>
+                <a:lnTo>
+                  <a:pt x="1730" y="1966"/>
+                </a:lnTo>
+                <a:lnTo>
+                  <a:pt x="1854" y="1940"/>
+                </a:lnTo>
+                <a:lnTo>
+                  <a:pt x="1977" y="1913"/>
+                </a:lnTo>
+                <a:lnTo>
+                  <a:pt x="2101" y="1886"/>
+                </a:lnTo>
+                <a:lnTo>
+                  <a:pt x="2224" y="1858"/>
+                </a:lnTo>
+                <a:lnTo>
+                  <a:pt x="2349" y="1830"/>
+                </a:lnTo>
+                <a:lnTo>
+                  <a:pt x="2473" y="1801"/>
+                </a:lnTo>
+                <a:lnTo>
+                  <a:pt x="2596" y="1772"/>
+                </a:lnTo>
+                <a:lnTo>
+                  <a:pt x="2720" y="1741"/>
+                </a:lnTo>
+                <a:lnTo>
+                  <a:pt x="2843" y="1711"/>
+                </a:lnTo>
+                <a:lnTo>
+                  <a:pt x="2967" y="1679"/>
+                </a:lnTo>
+                <a:lnTo>
+                  <a:pt x="3090" y="1647"/>
+                </a:lnTo>
+                <a:lnTo>
+                  <a:pt x="3214" y="1614"/>
+                </a:lnTo>
+                <a:lnTo>
+                  <a:pt x="3338" y="1580"/>
+                </a:lnTo>
+                <a:lnTo>
+                  <a:pt x="3461" y="1546"/>
+                </a:lnTo>
+                <a:lnTo>
+                  <a:pt x="3585" y="1510"/>
+                </a:lnTo>
+                <a:lnTo>
+                  <a:pt x="3708" y="1474"/>
+                </a:lnTo>
+                <a:lnTo>
+                  <a:pt x="3832" y="1438"/>
+                </a:lnTo>
+                <a:lnTo>
+                  <a:pt x="3955" y="1400"/>
+                </a:lnTo>
+                <a:lnTo>
+                  <a:pt x="4079" y="1362"/>
+                </a:lnTo>
+                <a:lnTo>
+                  <a:pt x="4203" y="1322"/>
+                </a:lnTo>
+                <a:lnTo>
+                  <a:pt x="4326" y="1282"/>
+                </a:lnTo>
+                <a:lnTo>
+                  <a:pt x="4450" y="1241"/>
+                </a:lnTo>
+                <a:lnTo>
+                  <a:pt x="4573" y="1199"/>
+                </a:lnTo>
+                <a:lnTo>
+                  <a:pt x="4697" y="1156"/>
+                </a:lnTo>
+                <a:lnTo>
+                  <a:pt x="4820" y="1111"/>
+                </a:lnTo>
+                <a:lnTo>
+                  <a:pt x="4944" y="1066"/>
+                </a:lnTo>
+                <a:lnTo>
+                  <a:pt x="5068" y="1021"/>
+                </a:lnTo>
+                <a:lnTo>
+                  <a:pt x="5191" y="974"/>
+                </a:lnTo>
+                <a:lnTo>
+                  <a:pt x="5315" y="926"/>
+                </a:lnTo>
+                <a:lnTo>
+                  <a:pt x="5438" y="877"/>
+                </a:lnTo>
+                <a:lnTo>
+                  <a:pt x="5562" y="827"/>
+                </a:lnTo>
+                <a:lnTo>
+                  <a:pt x="5685" y="776"/>
+                </a:lnTo>
+                <a:lnTo>
+                  <a:pt x="5809" y="724"/>
+                </a:lnTo>
+                <a:lnTo>
+                  <a:pt x="5933" y="671"/>
+                </a:lnTo>
+                <a:lnTo>
+                  <a:pt x="6056" y="616"/>
+                </a:lnTo>
+                <a:lnTo>
+                  <a:pt x="6180" y="560"/>
+                </a:lnTo>
+                <a:lnTo>
+                  <a:pt x="6303" y="503"/>
+                </a:lnTo>
+                <a:lnTo>
+                  <a:pt x="6427" y="445"/>
+                </a:lnTo>
+                <a:lnTo>
+                  <a:pt x="6550" y="385"/>
+                </a:lnTo>
+                <a:lnTo>
+                  <a:pt x="6674" y="325"/>
+                </a:lnTo>
+                <a:lnTo>
+                  <a:pt x="6798" y="263"/>
+                </a:lnTo>
+                <a:lnTo>
+                  <a:pt x="6921" y="199"/>
+                </a:lnTo>
+                <a:lnTo>
+                  <a:pt x="7045" y="134"/>
+                </a:lnTo>
+                <a:lnTo>
+                  <a:pt x="7168" y="68"/>
                 </a:lnTo>
                 <a:lnTo>
                   <a:pt x="7292" y="0"/>
@@ -6245,8 +6242,8 @@
         </p:nvSpPr>
         <p:spPr>
           <a:xfrm>
-            <a:off x="491040" y="3246840"/>
-            <a:ext cx="2625120" cy="338400"/>
+            <a:off x="491040" y="3252600"/>
+            <a:ext cx="2625120" cy="271440"/>
           </a:xfrm>
           <a:custGeom>
             <a:avLst/>
@@ -6254,159 +6251,147 @@
             <a:ahLst/>
             <a:rect l="0" t="0" r="r" b="b"/>
             <a:pathLst>
-              <a:path fill="none" w="7292" h="940">
+              <a:path fill="none" w="7292" h="754">
                 <a:moveTo>
-                  <a:pt x="0" y="940"/>
+                  <a:pt x="0" y="754"/>
                 </a:moveTo>
                 <a:lnTo>
-                  <a:pt x="124" y="926"/>
-                </a:lnTo>
-                <a:lnTo>
-                  <a:pt x="247" y="913"/>
-                </a:lnTo>
-                <a:lnTo>
-                  <a:pt x="371" y="899"/>
-                </a:lnTo>
-                <a:lnTo>
-                  <a:pt x="495" y="886"/>
-                </a:lnTo>
-                <a:lnTo>
-                  <a:pt x="618" y="872"/>
-                </a:lnTo>
-                <a:lnTo>
-                  <a:pt x="865" y="845"/>
-                </a:lnTo>
-                <a:lnTo>
-                  <a:pt x="989" y="831"/>
-                </a:lnTo>
-                <a:lnTo>
-                  <a:pt x="1360" y="787"/>
-                </a:lnTo>
-                <a:lnTo>
-                  <a:pt x="1483" y="773"/>
-                </a:lnTo>
-                <a:lnTo>
-                  <a:pt x="1730" y="744"/>
-                </a:lnTo>
-                <a:lnTo>
-                  <a:pt x="1854" y="730"/>
-                </a:lnTo>
-                <a:lnTo>
-                  <a:pt x="1977" y="715"/>
-                </a:lnTo>
-                <a:lnTo>
-                  <a:pt x="2101" y="701"/>
-                </a:lnTo>
-                <a:lnTo>
-                  <a:pt x="2224" y="686"/>
-                </a:lnTo>
-                <a:lnTo>
-                  <a:pt x="2349" y="671"/>
-                </a:lnTo>
-                <a:lnTo>
-                  <a:pt x="2473" y="656"/>
-                </a:lnTo>
-                <a:lnTo>
-                  <a:pt x="2596" y="641"/>
-                </a:lnTo>
-                <a:lnTo>
-                  <a:pt x="2720" y="626"/>
-                </a:lnTo>
-                <a:lnTo>
-                  <a:pt x="2843" y="611"/>
-                </a:lnTo>
-                <a:lnTo>
-                  <a:pt x="2967" y="596"/>
-                </a:lnTo>
-                <a:lnTo>
-                  <a:pt x="3090" y="580"/>
-                </a:lnTo>
-                <a:lnTo>
-                  <a:pt x="3214" y="565"/>
-                </a:lnTo>
-                <a:lnTo>
-                  <a:pt x="3338" y="549"/>
-                </a:lnTo>
-                <a:lnTo>
-                  <a:pt x="3461" y="534"/>
-                </a:lnTo>
-                <a:lnTo>
-                  <a:pt x="3585" y="518"/>
-                </a:lnTo>
-                <a:lnTo>
-                  <a:pt x="3708" y="502"/>
-                </a:lnTo>
-                <a:lnTo>
-                  <a:pt x="3832" y="486"/>
-                </a:lnTo>
-                <a:lnTo>
-                  <a:pt x="3955" y="470"/>
-                </a:lnTo>
-                <a:lnTo>
-                  <a:pt x="4203" y="438"/>
-                </a:lnTo>
-                <a:lnTo>
-                  <a:pt x="4326" y="421"/>
-                </a:lnTo>
-                <a:lnTo>
-                  <a:pt x="4450" y="405"/>
-                </a:lnTo>
-                <a:lnTo>
-                  <a:pt x="4573" y="389"/>
-                </a:lnTo>
-                <a:lnTo>
-                  <a:pt x="4697" y="372"/>
-                </a:lnTo>
-                <a:lnTo>
-                  <a:pt x="4820" y="355"/>
-                </a:lnTo>
-                <a:lnTo>
-                  <a:pt x="4944" y="339"/>
-                </a:lnTo>
-                <a:lnTo>
-                  <a:pt x="5068" y="322"/>
-                </a:lnTo>
-                <a:lnTo>
-                  <a:pt x="5191" y="305"/>
-                </a:lnTo>
-                <a:lnTo>
-                  <a:pt x="5438" y="271"/>
-                </a:lnTo>
-                <a:lnTo>
-                  <a:pt x="5562" y="253"/>
-                </a:lnTo>
-                <a:lnTo>
-                  <a:pt x="5685" y="236"/>
-                </a:lnTo>
-                <a:lnTo>
-                  <a:pt x="5809" y="218"/>
-                </a:lnTo>
-                <a:lnTo>
-                  <a:pt x="5933" y="201"/>
-                </a:lnTo>
-                <a:lnTo>
-                  <a:pt x="6056" y="183"/>
-                </a:lnTo>
-                <a:lnTo>
-                  <a:pt x="6180" y="165"/>
-                </a:lnTo>
-                <a:lnTo>
-                  <a:pt x="6303" y="148"/>
-                </a:lnTo>
-                <a:lnTo>
-                  <a:pt x="6550" y="111"/>
-                </a:lnTo>
-                <a:lnTo>
-                  <a:pt x="6674" y="93"/>
-                </a:lnTo>
-                <a:lnTo>
-                  <a:pt x="6798" y="75"/>
-                </a:lnTo>
-                <a:lnTo>
-                  <a:pt x="7045" y="38"/>
-                </a:lnTo>
-                <a:lnTo>
-                  <a:pt x="7168" y="19"/>
+                  <a:pt x="124" y="742"/>
+                </a:lnTo>
+                <a:lnTo>
+                  <a:pt x="247" y="731"/>
+                </a:lnTo>
+                <a:lnTo>
+                  <a:pt x="495" y="709"/>
+                </a:lnTo>
+                <a:lnTo>
+                  <a:pt x="618" y="697"/>
+                </a:lnTo>
+                <a:lnTo>
+                  <a:pt x="865" y="674"/>
+                </a:lnTo>
+                <a:lnTo>
+                  <a:pt x="989" y="663"/>
+                </a:lnTo>
+                <a:lnTo>
+                  <a:pt x="1236" y="640"/>
+                </a:lnTo>
+                <a:lnTo>
+                  <a:pt x="1360" y="628"/>
+                </a:lnTo>
+                <a:lnTo>
+                  <a:pt x="1483" y="616"/>
+                </a:lnTo>
+                <a:lnTo>
+                  <a:pt x="1607" y="605"/>
+                </a:lnTo>
+                <a:lnTo>
+                  <a:pt x="1730" y="593"/>
+                </a:lnTo>
+                <a:lnTo>
+                  <a:pt x="1854" y="581"/>
+                </a:lnTo>
+                <a:lnTo>
+                  <a:pt x="2101" y="557"/>
+                </a:lnTo>
+                <a:lnTo>
+                  <a:pt x="2224" y="545"/>
+                </a:lnTo>
+                <a:lnTo>
+                  <a:pt x="2349" y="533"/>
+                </a:lnTo>
+                <a:lnTo>
+                  <a:pt x="2473" y="521"/>
+                </a:lnTo>
+                <a:lnTo>
+                  <a:pt x="2596" y="508"/>
+                </a:lnTo>
+                <a:lnTo>
+                  <a:pt x="2720" y="496"/>
+                </a:lnTo>
+                <a:lnTo>
+                  <a:pt x="2967" y="471"/>
+                </a:lnTo>
+                <a:lnTo>
+                  <a:pt x="3090" y="459"/>
+                </a:lnTo>
+                <a:lnTo>
+                  <a:pt x="3214" y="447"/>
+                </a:lnTo>
+                <a:lnTo>
+                  <a:pt x="3338" y="434"/>
+                </a:lnTo>
+                <a:lnTo>
+                  <a:pt x="3461" y="421"/>
+                </a:lnTo>
+                <a:lnTo>
+                  <a:pt x="3708" y="396"/>
+                </a:lnTo>
+                <a:lnTo>
+                  <a:pt x="3832" y="383"/>
+                </a:lnTo>
+                <a:lnTo>
+                  <a:pt x="3955" y="370"/>
+                </a:lnTo>
+                <a:lnTo>
+                  <a:pt x="4203" y="343"/>
+                </a:lnTo>
+                <a:lnTo>
+                  <a:pt x="4326" y="330"/>
+                </a:lnTo>
+                <a:lnTo>
+                  <a:pt x="4450" y="317"/>
+                </a:lnTo>
+                <a:lnTo>
+                  <a:pt x="4573" y="304"/>
+                </a:lnTo>
+                <a:lnTo>
+                  <a:pt x="4697" y="291"/>
+                </a:lnTo>
+                <a:lnTo>
+                  <a:pt x="4820" y="278"/>
+                </a:lnTo>
+                <a:lnTo>
+                  <a:pt x="4944" y="264"/>
+                </a:lnTo>
+                <a:lnTo>
+                  <a:pt x="5068" y="251"/>
+                </a:lnTo>
+                <a:lnTo>
+                  <a:pt x="5438" y="211"/>
+                </a:lnTo>
+                <a:lnTo>
+                  <a:pt x="5562" y="197"/>
+                </a:lnTo>
+                <a:lnTo>
+                  <a:pt x="5685" y="183"/>
+                </a:lnTo>
+                <a:lnTo>
+                  <a:pt x="5809" y="170"/>
+                </a:lnTo>
+                <a:lnTo>
+                  <a:pt x="5933" y="156"/>
+                </a:lnTo>
+                <a:lnTo>
+                  <a:pt x="6180" y="128"/>
+                </a:lnTo>
+                <a:lnTo>
+                  <a:pt x="6303" y="114"/>
+                </a:lnTo>
+                <a:lnTo>
+                  <a:pt x="6550" y="86"/>
+                </a:lnTo>
+                <a:lnTo>
+                  <a:pt x="6674" y="72"/>
+                </a:lnTo>
+                <a:lnTo>
+                  <a:pt x="6798" y="57"/>
+                </a:lnTo>
+                <a:lnTo>
+                  <a:pt x="7045" y="29"/>
+                </a:lnTo>
+                <a:lnTo>
+                  <a:pt x="7168" y="14"/>
                 </a:lnTo>
                 <a:lnTo>
                   <a:pt x="7292" y="0"/>
@@ -6493,7 +6478,7 @@
         </p:nvSpPr>
         <p:spPr>
           <a:xfrm>
-            <a:off x="519840" y="4289040"/>
+            <a:off x="519840" y="4289400"/>
             <a:ext cx="318240" cy="86040"/>
           </a:xfrm>
           <a:prstGeom prst="rect">
@@ -6541,7 +6526,7 @@
         </p:nvSpPr>
         <p:spPr>
           <a:xfrm>
-            <a:off x="519840" y="3877920"/>
+            <a:off x="519840" y="3879000"/>
             <a:ext cx="360720" cy="86040"/>
           </a:xfrm>
           <a:prstGeom prst="rect">
@@ -6589,7 +6574,7 @@
         </p:nvSpPr>
         <p:spPr>
           <a:xfrm>
-            <a:off x="519840" y="3414240"/>
+            <a:off x="519840" y="3416760"/>
             <a:ext cx="466560" cy="86040"/>
           </a:xfrm>
           <a:prstGeom prst="rect">
@@ -6616,7 +6601,7 @@
                 <a:latin typeface="Arial"/>
                 <a:ea typeface="Arial"/>
               </a:rPr>
-              <a:t>1,114 visits/yr</a:t>
+              <a:t>1,163 visits/yr</a:t>
             </a:r>
             <a:endParaRPr lang="en-US" sz="600" b="0" u="none" strike="noStrike">
               <a:solidFill>
@@ -6755,7 +6740,7 @@
                 <a:latin typeface="Arial"/>
                 <a:ea typeface="Arial"/>
               </a:rPr>
-              <a:t>1 SD of effort = ×7.7 annual visits</a:t>
+              <a:t>1 SD of effort = ×7.9 annual visits</a:t>
             </a:r>
             <a:endParaRPr lang="en-US" sz="600" b="0" u="none" strike="noStrike">
               <a:solidFill>
@@ -6824,7 +6809,7 @@
         </p:nvSpPr>
         <p:spPr>
           <a:xfrm>
-            <a:off x="215280" y="3854160"/>
+            <a:off x="215280" y="3855600"/>
             <a:ext cx="106560" cy="86040"/>
           </a:xfrm>
           <a:prstGeom prst="rect">
@@ -6872,7 +6857,7 @@
         </p:nvSpPr>
         <p:spPr>
           <a:xfrm>
-            <a:off x="215280" y="3350160"/>
+            <a:off x="215280" y="3353040"/>
             <a:ext cx="106560" cy="86040"/>
           </a:xfrm>
           <a:prstGeom prst="rect">
@@ -6963,7 +6948,7 @@
         </p:nvSpPr>
         <p:spPr>
           <a:xfrm>
-            <a:off x="334440" y="3898440"/>
+            <a:off x="334440" y="3899880"/>
             <a:ext cx="25560" cy="0"/>
           </a:xfrm>
           <a:prstGeom prst="line">
@@ -7006,7 +6991,7 @@
         </p:nvSpPr>
         <p:spPr>
           <a:xfrm>
-            <a:off x="334440" y="3394440"/>
+            <a:off x="334440" y="3397320"/>
             <a:ext cx="25560" cy="0"/>
           </a:xfrm>
           <a:prstGeom prst="line">
@@ -7049,7 +7034,7 @@
         </p:nvSpPr>
         <p:spPr>
           <a:xfrm>
-            <a:off x="334440" y="2890440"/>
+            <a:off x="334440" y="2895120"/>
             <a:ext cx="25560" cy="0"/>
           </a:xfrm>
           <a:prstGeom prst="line">
@@ -7264,7 +7249,7 @@
         </p:nvSpPr>
         <p:spPr>
           <a:xfrm flipV="1">
-            <a:off x="2526840" y="4402080"/>
+            <a:off x="2526480" y="4402080"/>
             <a:ext cx="0" cy="25560"/>
           </a:xfrm>
           <a:prstGeom prst="line">
@@ -7350,7 +7335,7 @@
         </p:nvSpPr>
         <p:spPr>
           <a:xfrm>
-            <a:off x="215280" y="2846160"/>
+            <a:off x="215280" y="2850840"/>
             <a:ext cx="106560" cy="86040"/>
           </a:xfrm>
           <a:prstGeom prst="rect">
@@ -7446,7 +7431,7 @@
         </p:nvSpPr>
         <p:spPr>
           <a:xfrm>
-            <a:off x="1017000" y="4432680"/>
+            <a:off x="1016640" y="4432680"/>
             <a:ext cx="151200" cy="86040"/>
           </a:xfrm>
           <a:prstGeom prst="rect">
@@ -7494,7 +7479,7 @@
         </p:nvSpPr>
         <p:spPr>
           <a:xfrm>
-            <a:off x="1759320" y="4432680"/>
+            <a:off x="1758960" y="4432680"/>
             <a:ext cx="106560" cy="86040"/>
           </a:xfrm>
           <a:prstGeom prst="rect">
@@ -7889,7 +7874,7 @@
         <p:spPr>
           <a:xfrm>
             <a:off x="4203720" y="3114000"/>
-            <a:ext cx="900360" cy="0"/>
+            <a:ext cx="898200" cy="0"/>
           </a:xfrm>
           <a:prstGeom prst="line">
             <a:avLst/>
@@ -7932,7 +7917,7 @@
         <p:spPr>
           <a:xfrm>
             <a:off x="4203720" y="3409560"/>
-            <a:ext cx="725040" cy="0"/>
+            <a:ext cx="737640" cy="0"/>
           </a:xfrm>
           <a:prstGeom prst="line">
             <a:avLst/>
@@ -7975,7 +7960,7 @@
         <p:spPr>
           <a:xfrm>
             <a:off x="4203720" y="2818440"/>
-            <a:ext cx="1787040" cy="0"/>
+            <a:ext cx="1773360" cy="0"/>
           </a:xfrm>
           <a:prstGeom prst="line">
             <a:avLst/>
@@ -8017,7 +8002,7 @@
         </p:nvSpPr>
         <p:spPr>
           <a:xfrm>
-            <a:off x="5079600" y="3089520"/>
+            <a:off x="5077440" y="3089520"/>
             <a:ext cx="49320" cy="49320"/>
           </a:xfrm>
           <a:custGeom>
@@ -8075,7 +8060,7 @@
         </p:nvSpPr>
         <p:spPr>
           <a:xfrm>
-            <a:off x="5079600" y="3089520"/>
+            <a:off x="5077440" y="3089520"/>
             <a:ext cx="49320" cy="49320"/>
           </a:xfrm>
           <a:custGeom>
@@ -8132,7 +8117,7 @@
         </p:nvSpPr>
         <p:spPr>
           <a:xfrm>
-            <a:off x="4904280" y="3385080"/>
+            <a:off x="4916880" y="3385080"/>
             <a:ext cx="49320" cy="49320"/>
           </a:xfrm>
           <a:custGeom>
@@ -8190,7 +8175,7 @@
         </p:nvSpPr>
         <p:spPr>
           <a:xfrm>
-            <a:off x="4904280" y="3385080"/>
+            <a:off x="4916880" y="3385080"/>
             <a:ext cx="49320" cy="49320"/>
           </a:xfrm>
           <a:custGeom>
@@ -8247,8 +8232,8 @@
         </p:nvSpPr>
         <p:spPr>
           <a:xfrm>
-            <a:off x="5965920" y="2793960"/>
-            <a:ext cx="49680" cy="49320"/>
+            <a:off x="5952600" y="2793960"/>
+            <a:ext cx="49320" cy="49320"/>
           </a:xfrm>
           <a:custGeom>
             <a:avLst/>
@@ -8256,17 +8241,17 @@
             <a:ahLst/>
             <a:rect l="0" t="0" r="r" b="b"/>
             <a:pathLst>
-              <a:path w="138" h="137">
+              <a:path w="137" h="137">
                 <a:moveTo>
                   <a:pt x="0" y="69"/>
                 </a:moveTo>
                 <a:cubicBezTo>
                   <a:pt x="0" y="-23"/>
-                  <a:pt x="138" y="-23"/>
-                  <a:pt x="138" y="69"/>
+                  <a:pt x="137" y="-23"/>
+                  <a:pt x="137" y="69"/>
                 </a:cubicBezTo>
                 <a:cubicBezTo>
-                  <a:pt x="138" y="160"/>
+                  <a:pt x="137" y="160"/>
                   <a:pt x="0" y="160"/>
                   <a:pt x="0" y="69"/>
                 </a:cubicBezTo>
@@ -8305,8 +8290,8 @@
         </p:nvSpPr>
         <p:spPr>
           <a:xfrm>
-            <a:off x="5965920" y="2793960"/>
-            <a:ext cx="49680" cy="49320"/>
+            <a:off x="5952600" y="2793960"/>
+            <a:ext cx="49320" cy="49320"/>
           </a:xfrm>
           <a:custGeom>
             <a:avLst/>
@@ -8314,19 +8299,19 @@
             <a:ahLst/>
             <a:rect l="0" t="0" r="r" b="b"/>
             <a:pathLst>
-              <a:path fill="none" w="138" h="137">
+              <a:path fill="none" w="137" h="137">
                 <a:moveTo>
-                  <a:pt x="138" y="69"/>
+                  <a:pt x="137" y="69"/>
                 </a:moveTo>
                 <a:cubicBezTo>
-                  <a:pt x="138" y="160"/>
+                  <a:pt x="137" y="160"/>
                   <a:pt x="0" y="160"/>
                   <a:pt x="0" y="69"/>
                 </a:cubicBezTo>
                 <a:cubicBezTo>
                   <a:pt x="0" y="-23"/>
-                  <a:pt x="138" y="-23"/>
-                  <a:pt x="138" y="69"/>
+                  <a:pt x="137" y="-23"/>
+                  <a:pt x="137" y="69"/>
                 </a:cubicBezTo>
               </a:path>
             </a:pathLst>
@@ -8410,7 +8395,7 @@
         </p:nvSpPr>
         <p:spPr>
           <a:xfrm>
-            <a:off x="5161320" y="3069720"/>
+            <a:off x="5159160" y="3069720"/>
             <a:ext cx="193680" cy="86040"/>
           </a:xfrm>
           <a:prstGeom prst="rect">
@@ -8458,7 +8443,7 @@
         </p:nvSpPr>
         <p:spPr>
           <a:xfrm>
-            <a:off x="4986000" y="3365280"/>
+            <a:off x="4998960" y="3365280"/>
             <a:ext cx="193680" cy="86040"/>
           </a:xfrm>
           <a:prstGeom prst="rect">
@@ -8613,7 +8598,7 @@
         <p:spPr>
           <a:xfrm>
             <a:off x="4203720" y="4224960"/>
-            <a:ext cx="686160" cy="0"/>
+            <a:ext cx="691200" cy="0"/>
           </a:xfrm>
           <a:prstGeom prst="line">
             <a:avLst/>
@@ -8656,7 +8641,7 @@
         <p:spPr>
           <a:xfrm>
             <a:off x="4203720" y="3929400"/>
-            <a:ext cx="753840" cy="0"/>
+            <a:ext cx="793800" cy="0"/>
           </a:xfrm>
           <a:prstGeom prst="line">
             <a:avLst/>
@@ -8698,7 +8683,7 @@
         </p:nvSpPr>
         <p:spPr>
           <a:xfrm>
-            <a:off x="4865400" y="4200480"/>
+            <a:off x="4870440" y="4200480"/>
             <a:ext cx="49320" cy="49320"/>
           </a:xfrm>
           <a:custGeom>
@@ -8756,7 +8741,7 @@
         </p:nvSpPr>
         <p:spPr>
           <a:xfrm>
-            <a:off x="4865400" y="4200480"/>
+            <a:off x="4870440" y="4200480"/>
             <a:ext cx="49320" cy="49320"/>
           </a:xfrm>
           <a:custGeom>
@@ -8813,7 +8798,7 @@
         </p:nvSpPr>
         <p:spPr>
           <a:xfrm>
-            <a:off x="4933080" y="3904560"/>
+            <a:off x="4973040" y="3904560"/>
             <a:ext cx="49320" cy="49320"/>
           </a:xfrm>
           <a:custGeom>
@@ -8871,7 +8856,7 @@
         </p:nvSpPr>
         <p:spPr>
           <a:xfrm>
-            <a:off x="4933080" y="3904560"/>
+            <a:off x="4973040" y="3904560"/>
             <a:ext cx="49320" cy="49320"/>
           </a:xfrm>
           <a:custGeom>
@@ -8928,7 +8913,7 @@
         </p:nvSpPr>
         <p:spPr>
           <a:xfrm>
-            <a:off x="6048000" y="2774160"/>
+            <a:off x="6034320" y="2774160"/>
             <a:ext cx="193680" cy="86040"/>
           </a:xfrm>
           <a:prstGeom prst="rect">
@@ -8955,7 +8940,7 @@
                 <a:latin typeface="Arial"/>
                 <a:ea typeface="Arial"/>
               </a:rPr>
-              <a:t>×2.23</a:t>
+              <a:t>×2.22</a:t>
             </a:r>
             <a:endParaRPr lang="en-US" sz="600" b="0" u="none" strike="noStrike">
               <a:solidFill>
@@ -8976,7 +8961,7 @@
         </p:nvSpPr>
         <p:spPr>
           <a:xfrm>
-            <a:off x="4947120" y="4180680"/>
+            <a:off x="4952160" y="4180680"/>
             <a:ext cx="193680" cy="86040"/>
           </a:xfrm>
           <a:prstGeom prst="rect">
@@ -9024,7 +9009,7 @@
         </p:nvSpPr>
         <p:spPr>
           <a:xfrm>
-            <a:off x="5014800" y="3885120"/>
+            <a:off x="5055120" y="3885120"/>
             <a:ext cx="193680" cy="86040"/>
           </a:xfrm>
           <a:prstGeom prst="rect">
@@ -9051,7 +9036,7 @@
                 <a:latin typeface="Arial"/>
                 <a:ea typeface="Arial"/>
               </a:rPr>
-              <a:t>×1.40</a:t>
+              <a:t>×1.43</a:t>
             </a:r>
             <a:endParaRPr lang="en-US" sz="600" b="0" u="none" strike="noStrike">
               <a:solidFill>
